--- a/PPTs/Lecture 11 Exercises ANS.pptx
+++ b/PPTs/Lecture 11 Exercises ANS.pptx
@@ -310,10 +310,92 @@
       <p15:sldGuideLst xmlns:p15="http://schemas.microsoft.com/office/powerpoint/2012/main"/>
     </p:ext>
     <p:ext uri="GoogleSlidesCustomDataVersion2">
-      <go:slidesCustomData xmlns="" xmlns:mc="http://schemas.openxmlformats.org/markup-compatibility/2006" xmlns:mv="urn:schemas-microsoft-com:mac:vml" xmlns:c="http://schemas.openxmlformats.org/drawingml/2006/chart" xmlns:dgm="http://schemas.openxmlformats.org/drawingml/2006/diagram" xmlns:o="urn:schemas-microsoft-com:office:office" xmlns:v="urn:schemas-microsoft-com:vml" xmlns:pvml="urn:schemas-microsoft-com:office:powerpoint" xmlns:com="http://schemas.openxmlformats.org/drawingml/2006/compatibility" xmlns:p14="http://schemas.microsoft.com/office/powerpoint/2010/main" xmlns:p15="http://schemas.microsoft.com/office/powerpoint/2012/main" xmlns:ahyp="http://schemas.microsoft.com/office/drawing/2018/hyperlinkcolor" xmlns:go="http://customooxmlschemas.google.com/" r:id="rId80" roundtripDataSignature="AMtx7mgTKnttNTquUA8oOlsPFIzqyeBK3A=="/>
+      <go:slidesCustomData xmlns:go="http://customooxmlschemas.google.com/" xmlns:ahyp="http://schemas.microsoft.com/office/drawing/2018/hyperlinkcolor" xmlns:p15="http://schemas.microsoft.com/office/powerpoint/2012/main" xmlns:p14="http://schemas.microsoft.com/office/powerpoint/2010/main" xmlns:com="http://schemas.openxmlformats.org/drawingml/2006/compatibility" xmlns:pvml="urn:schemas-microsoft-com:office:powerpoint" xmlns:v="urn:schemas-microsoft-com:vml" xmlns:o="urn:schemas-microsoft-com:office:office" xmlns:dgm="http://schemas.openxmlformats.org/drawingml/2006/diagram" xmlns:c="http://schemas.openxmlformats.org/drawingml/2006/chart" xmlns:mv="urn:schemas-microsoft-com:mac:vml" xmlns:mc="http://schemas.openxmlformats.org/markup-compatibility/2006" xmlns="" r:id="rId80" roundtripDataSignature="AMtx7mgTKnttNTquUA8oOlsPFIzqyeBK3A=="/>
     </p:ext>
   </p:extLst>
 </p:presentation>
+</file>
+
+<file path=ppt/revisionInfo.xml><?xml version="1.0" encoding="utf-8"?>
+<p1510:revInfo xmlns:a="http://schemas.openxmlformats.org/drawingml/2006/main" xmlns:r="http://schemas.openxmlformats.org/officeDocument/2006/relationships" xmlns:p1510="http://schemas.microsoft.com/office/powerpoint/2015/10/main">
+  <p1510:revLst>
+    <p1510:client id="{D12023F1-E681-4367-BF4C-33535612FF8E}" v="4" dt="2026-04-21T19:35:29.310"/>
+  </p1510:revLst>
+</p1510:revInfo>
+</file>
+
+<file path=ppt/changesInfos/changesInfo1.xml><?xml version="1.0" encoding="utf-8"?>
+<pc:chgInfo xmlns:a="http://schemas.openxmlformats.org/drawingml/2006/main" xmlns:r="http://schemas.openxmlformats.org/officeDocument/2006/relationships" xmlns:ac="http://schemas.microsoft.com/office/drawing/2013/main/command" xmlns:pc="http://schemas.microsoft.com/office/powerpoint/2013/main/command">
+  <pc:docChgLst>
+    <pc:chgData name="Zonghua Gu" userId="9a7e1853e1951ef5" providerId="LiveId" clId="{CF1FAA12-072C-4ED5-BA76-0FFFAEFDB88A}"/>
+    <pc:docChg chg="modSld">
+      <pc:chgData name="Zonghua Gu" userId="9a7e1853e1951ef5" providerId="LiveId" clId="{CF1FAA12-072C-4ED5-BA76-0FFFAEFDB88A}" dt="2026-04-21T19:35:41.547" v="427" actId="1076"/>
+      <pc:docMkLst>
+        <pc:docMk/>
+      </pc:docMkLst>
+      <pc:sldChg chg="modSp mod">
+        <pc:chgData name="Zonghua Gu" userId="9a7e1853e1951ef5" providerId="LiveId" clId="{CF1FAA12-072C-4ED5-BA76-0FFFAEFDB88A}" dt="2026-04-21T19:27:32.169" v="1" actId="207"/>
+        <pc:sldMkLst>
+          <pc:docMk/>
+          <pc:sldMk cId="0" sldId="292"/>
+        </pc:sldMkLst>
+        <pc:spChg chg="mod">
+          <ac:chgData name="Zonghua Gu" userId="9a7e1853e1951ef5" providerId="LiveId" clId="{CF1FAA12-072C-4ED5-BA76-0FFFAEFDB88A}" dt="2026-04-21T19:27:32.169" v="1" actId="207"/>
+          <ac:spMkLst>
+            <pc:docMk/>
+            <pc:sldMk cId="0" sldId="292"/>
+            <ac:spMk id="3" creationId="{D5DE19AD-E9B1-F062-2D80-3D34AFED2247}"/>
+          </ac:spMkLst>
+        </pc:spChg>
+      </pc:sldChg>
+      <pc:sldChg chg="addSp modSp mod">
+        <pc:chgData name="Zonghua Gu" userId="9a7e1853e1951ef5" providerId="LiveId" clId="{CF1FAA12-072C-4ED5-BA76-0FFFAEFDB88A}" dt="2026-04-21T19:35:35.583" v="426" actId="1076"/>
+        <pc:sldMkLst>
+          <pc:docMk/>
+          <pc:sldMk cId="0" sldId="294"/>
+        </pc:sldMkLst>
+        <pc:spChg chg="add mod">
+          <ac:chgData name="Zonghua Gu" userId="9a7e1853e1951ef5" providerId="LiveId" clId="{CF1FAA12-072C-4ED5-BA76-0FFFAEFDB88A}" dt="2026-04-21T19:35:35.583" v="426" actId="1076"/>
+          <ac:spMkLst>
+            <pc:docMk/>
+            <pc:sldMk cId="0" sldId="294"/>
+            <ac:spMk id="3" creationId="{4D629594-DA59-DDE1-EB9C-83C797F9D0FD}"/>
+          </ac:spMkLst>
+        </pc:spChg>
+      </pc:sldChg>
+      <pc:sldChg chg="addSp modSp mod">
+        <pc:chgData name="Zonghua Gu" userId="9a7e1853e1951ef5" providerId="LiveId" clId="{CF1FAA12-072C-4ED5-BA76-0FFFAEFDB88A}" dt="2026-04-21T19:35:41.547" v="427" actId="1076"/>
+        <pc:sldMkLst>
+          <pc:docMk/>
+          <pc:sldMk cId="0" sldId="295"/>
+        </pc:sldMkLst>
+        <pc:spChg chg="add mod">
+          <ac:chgData name="Zonghua Gu" userId="9a7e1853e1951ef5" providerId="LiveId" clId="{CF1FAA12-072C-4ED5-BA76-0FFFAEFDB88A}" dt="2026-04-21T19:35:41.547" v="427" actId="1076"/>
+          <ac:spMkLst>
+            <pc:docMk/>
+            <pc:sldMk cId="0" sldId="295"/>
+            <ac:spMk id="6" creationId="{8920CA8C-82B9-EDE2-E0DA-A0E61C6CC045}"/>
+          </ac:spMkLst>
+        </pc:spChg>
+      </pc:sldChg>
+      <pc:sldChg chg="modSp mod">
+        <pc:chgData name="Zonghua Gu" userId="9a7e1853e1951ef5" providerId="LiveId" clId="{CF1FAA12-072C-4ED5-BA76-0FFFAEFDB88A}" dt="2026-04-21T19:34:19.598" v="380" actId="20577"/>
+        <pc:sldMkLst>
+          <pc:docMk/>
+          <pc:sldMk cId="290662240" sldId="308"/>
+        </pc:sldMkLst>
+        <pc:spChg chg="mod">
+          <ac:chgData name="Zonghua Gu" userId="9a7e1853e1951ef5" providerId="LiveId" clId="{CF1FAA12-072C-4ED5-BA76-0FFFAEFDB88A}" dt="2026-04-21T19:34:19.598" v="380" actId="20577"/>
+          <ac:spMkLst>
+            <pc:docMk/>
+            <pc:sldMk cId="290662240" sldId="308"/>
+            <ac:spMk id="3" creationId="{9B226D49-75EA-17E5-7750-3332D2C79003}"/>
+          </ac:spMkLst>
+        </pc:spChg>
+      </pc:sldChg>
+    </pc:docChg>
+  </pc:docChgLst>
+</pc:chgInfo>
 </file>
 
 <file path=ppt/ink/ink1.xml><?xml version="1.0" encoding="utf-8"?>
@@ -29326,12 +29408,12 @@
             <a:effectLst/>
             <a:extLst>
               <a:ext uri="{909E8E84-426E-40dd-AFC4-6F175D3DCCD1}">
-                <a14:hiddenFill xmlns:a14="http://schemas.microsoft.com/office/drawing/2010/main" xmlns="">
+                <a14:hiddenFill xmlns="" xmlns:a14="http://schemas.microsoft.com/office/drawing/2010/main">
                   <a:noFill/>
                 </a14:hiddenFill>
               </a:ext>
               <a:ext uri="{AF507438-7753-43e0-B8FC-AC1667EBCBE1}">
-                <a14:hiddenEffects xmlns:a14="http://schemas.microsoft.com/office/drawing/2010/main" xmlns="">
+                <a14:hiddenEffects xmlns="" xmlns:a14="http://schemas.microsoft.com/office/drawing/2010/main">
                   <a:effectLst>
                     <a:outerShdw blurRad="63500" dist="38099" dir="2700000" algn="ctr" rotWithShape="0">
                       <a:schemeClr val="bg2">
@@ -29412,7 +29494,7 @@
             <a:effectLst/>
             <a:extLst>
               <a:ext uri="{91240B29-F687-4f45-9708-019B960494DF}">
-                <a14:hiddenLine xmlns:a14="http://schemas.microsoft.com/office/drawing/2010/main" xmlns="" w="9525">
+                <a14:hiddenLine xmlns="" xmlns:a14="http://schemas.microsoft.com/office/drawing/2010/main" w="9525">
                   <a:solidFill>
                     <a:schemeClr val="tx1"/>
                   </a:solidFill>
@@ -29422,7 +29504,7 @@
                 </a14:hiddenLine>
               </a:ext>
               <a:ext uri="{AF507438-7753-43e0-B8FC-AC1667EBCBE1}">
-                <a14:hiddenEffects xmlns:a14="http://schemas.microsoft.com/office/drawing/2010/main" xmlns="">
+                <a14:hiddenEffects xmlns="" xmlns:a14="http://schemas.microsoft.com/office/drawing/2010/main">
                   <a:effectLst>
                     <a:outerShdw blurRad="63500" dist="38099" dir="2700000" algn="ctr" rotWithShape="0">
                       <a:schemeClr val="bg2">
@@ -29501,14 +29583,14 @@
             <a:effectLst/>
             <a:extLst>
               <a:ext uri="{909E8E84-426E-40dd-AFC4-6F175D3DCCD1}">
-                <a14:hiddenFill xmlns:a14="http://schemas.microsoft.com/office/drawing/2010/main" xmlns="">
+                <a14:hiddenFill xmlns="" xmlns:a14="http://schemas.microsoft.com/office/drawing/2010/main">
                   <a:solidFill>
                     <a:srgbClr val="FFFFFF"/>
                   </a:solidFill>
                 </a14:hiddenFill>
               </a:ext>
               <a:ext uri="{91240B29-F687-4f45-9708-019B960494DF}">
-                <a14:hiddenLine xmlns:a14="http://schemas.microsoft.com/office/drawing/2010/main" xmlns="" w="9525">
+                <a14:hiddenLine xmlns="" xmlns:a14="http://schemas.microsoft.com/office/drawing/2010/main" w="9525">
                   <a:solidFill>
                     <a:schemeClr val="tx1"/>
                   </a:solidFill>
@@ -29518,7 +29600,7 @@
                 </a14:hiddenLine>
               </a:ext>
               <a:ext uri="{AF507438-7753-43e0-B8FC-AC1667EBCBE1}">
-                <a14:hiddenEffects xmlns:a14="http://schemas.microsoft.com/office/drawing/2010/main" xmlns="">
+                <a14:hiddenEffects xmlns="" xmlns:a14="http://schemas.microsoft.com/office/drawing/2010/main">
                   <a:effectLst>
                     <a:outerShdw blurRad="63500" dist="38099" dir="2700000" algn="ctr" rotWithShape="0">
                       <a:schemeClr val="bg2">
@@ -29709,14 +29791,14 @@
           <a:effectLst/>
           <a:extLst>
             <a:ext uri="{909E8E84-426E-40dd-AFC4-6F175D3DCCD1}">
-              <a14:hiddenFill xmlns:a14="http://schemas.microsoft.com/office/drawing/2010/main" xmlns="">
+              <a14:hiddenFill xmlns="" xmlns:a14="http://schemas.microsoft.com/office/drawing/2010/main">
                 <a:solidFill>
                   <a:srgbClr val="FFFFFF"/>
                 </a:solidFill>
               </a14:hiddenFill>
             </a:ext>
             <a:ext uri="{91240B29-F687-4f45-9708-019B960494DF}">
-              <a14:hiddenLine xmlns:a14="http://schemas.microsoft.com/office/drawing/2010/main" xmlns="" w="9525">
+              <a14:hiddenLine xmlns="" xmlns:a14="http://schemas.microsoft.com/office/drawing/2010/main" w="9525">
                 <a:solidFill>
                   <a:schemeClr val="tx1"/>
                 </a:solidFill>
@@ -29726,7 +29808,7 @@
               </a14:hiddenLine>
             </a:ext>
             <a:ext uri="{AF507438-7753-43e0-B8FC-AC1667EBCBE1}">
-              <a14:hiddenEffects xmlns:a14="http://schemas.microsoft.com/office/drawing/2010/main" xmlns="">
+              <a14:hiddenEffects xmlns="" xmlns:a14="http://schemas.microsoft.com/office/drawing/2010/main">
                 <a:effectLst>
                   <a:outerShdw blurRad="63500" dist="38099" dir="2700000" algn="ctr" rotWithShape="0">
                     <a:schemeClr val="bg2">
@@ -29916,14 +29998,14 @@
           <a:effectLst/>
           <a:extLst>
             <a:ext uri="{909E8E84-426E-40dd-AFC4-6F175D3DCCD1}">
-              <a14:hiddenFill xmlns:a14="http://schemas.microsoft.com/office/drawing/2010/main" xmlns="">
+              <a14:hiddenFill xmlns="" xmlns:a14="http://schemas.microsoft.com/office/drawing/2010/main">
                 <a:solidFill>
                   <a:srgbClr val="FFFFFF"/>
                 </a:solidFill>
               </a14:hiddenFill>
             </a:ext>
             <a:ext uri="{91240B29-F687-4f45-9708-019B960494DF}">
-              <a14:hiddenLine xmlns:a14="http://schemas.microsoft.com/office/drawing/2010/main" xmlns="" w="9525">
+              <a14:hiddenLine xmlns="" xmlns:a14="http://schemas.microsoft.com/office/drawing/2010/main" w="9525">
                 <a:solidFill>
                   <a:schemeClr val="tx1"/>
                 </a:solidFill>
@@ -29933,7 +30015,7 @@
               </a14:hiddenLine>
             </a:ext>
             <a:ext uri="{AF507438-7753-43e0-B8FC-AC1667EBCBE1}">
-              <a14:hiddenEffects xmlns:a14="http://schemas.microsoft.com/office/drawing/2010/main" xmlns="">
+              <a14:hiddenEffects xmlns="" xmlns:a14="http://schemas.microsoft.com/office/drawing/2010/main">
                 <a:effectLst>
                   <a:outerShdw blurRad="63500" dist="38099" dir="2700000" algn="ctr" rotWithShape="0">
                     <a:schemeClr val="bg2">
@@ -30148,12 +30230,12 @@
             <a:effectLst/>
             <a:extLst>
               <a:ext uri="{909E8E84-426E-40dd-AFC4-6F175D3DCCD1}">
-                <a14:hiddenFill xmlns:a14="http://schemas.microsoft.com/office/drawing/2010/main" xmlns="">
+                <a14:hiddenFill xmlns="" xmlns:a14="http://schemas.microsoft.com/office/drawing/2010/main">
                   <a:noFill/>
                 </a14:hiddenFill>
               </a:ext>
               <a:ext uri="{AF507438-7753-43e0-B8FC-AC1667EBCBE1}">
-                <a14:hiddenEffects xmlns:a14="http://schemas.microsoft.com/office/drawing/2010/main" xmlns="">
+                <a14:hiddenEffects xmlns="" xmlns:a14="http://schemas.microsoft.com/office/drawing/2010/main">
                   <a:effectLst>
                     <a:outerShdw blurRad="63500" dist="38099" dir="2700000" algn="ctr" rotWithShape="0">
                       <a:schemeClr val="bg2">
@@ -30234,7 +30316,7 @@
             <a:effectLst/>
             <a:extLst>
               <a:ext uri="{91240B29-F687-4f45-9708-019B960494DF}">
-                <a14:hiddenLine xmlns:a14="http://schemas.microsoft.com/office/drawing/2010/main" xmlns="" w="9525">
+                <a14:hiddenLine xmlns="" xmlns:a14="http://schemas.microsoft.com/office/drawing/2010/main" w="9525">
                   <a:solidFill>
                     <a:schemeClr val="tx1"/>
                   </a:solidFill>
@@ -30244,7 +30326,7 @@
                 </a14:hiddenLine>
               </a:ext>
               <a:ext uri="{AF507438-7753-43e0-B8FC-AC1667EBCBE1}">
-                <a14:hiddenEffects xmlns:a14="http://schemas.microsoft.com/office/drawing/2010/main" xmlns="">
+                <a14:hiddenEffects xmlns="" xmlns:a14="http://schemas.microsoft.com/office/drawing/2010/main">
                   <a:effectLst>
                     <a:outerShdw blurRad="63500" dist="38099" dir="2700000" algn="ctr" rotWithShape="0">
                       <a:schemeClr val="bg2">
@@ -30323,14 +30405,14 @@
             <a:effectLst/>
             <a:extLst>
               <a:ext uri="{909E8E84-426E-40dd-AFC4-6F175D3DCCD1}">
-                <a14:hiddenFill xmlns:a14="http://schemas.microsoft.com/office/drawing/2010/main" xmlns="">
+                <a14:hiddenFill xmlns="" xmlns:a14="http://schemas.microsoft.com/office/drawing/2010/main">
                   <a:solidFill>
                     <a:srgbClr val="FFFFFF"/>
                   </a:solidFill>
                 </a14:hiddenFill>
               </a:ext>
               <a:ext uri="{91240B29-F687-4f45-9708-019B960494DF}">
-                <a14:hiddenLine xmlns:a14="http://schemas.microsoft.com/office/drawing/2010/main" xmlns="" w="9525">
+                <a14:hiddenLine xmlns="" xmlns:a14="http://schemas.microsoft.com/office/drawing/2010/main" w="9525">
                   <a:solidFill>
                     <a:schemeClr val="tx1"/>
                   </a:solidFill>
@@ -30340,7 +30422,7 @@
                 </a14:hiddenLine>
               </a:ext>
               <a:ext uri="{AF507438-7753-43e0-B8FC-AC1667EBCBE1}">
-                <a14:hiddenEffects xmlns:a14="http://schemas.microsoft.com/office/drawing/2010/main" xmlns="">
+                <a14:hiddenEffects xmlns="" xmlns:a14="http://schemas.microsoft.com/office/drawing/2010/main">
                   <a:effectLst>
                     <a:outerShdw blurRad="63500" dist="38099" dir="2700000" algn="ctr" rotWithShape="0">
                       <a:schemeClr val="bg2">
@@ -30536,12 +30618,12 @@
           <a:effectLst/>
           <a:extLst>
             <a:ext uri="{909E8E84-426E-40dd-AFC4-6F175D3DCCD1}">
-              <a14:hiddenFill xmlns:a14="http://schemas.microsoft.com/office/drawing/2010/main" xmlns="">
+              <a14:hiddenFill xmlns="" xmlns:a14="http://schemas.microsoft.com/office/drawing/2010/main">
                 <a:noFill/>
               </a14:hiddenFill>
             </a:ext>
             <a:ext uri="{AF507438-7753-43e0-B8FC-AC1667EBCBE1}">
-              <a14:hiddenEffects xmlns:a14="http://schemas.microsoft.com/office/drawing/2010/main" xmlns="">
+              <a14:hiddenEffects xmlns="" xmlns:a14="http://schemas.microsoft.com/office/drawing/2010/main">
                 <a:effectLst>
                   <a:outerShdw blurRad="63500" dist="38099" dir="2700000" algn="ctr" rotWithShape="0">
                     <a:schemeClr val="bg2">
@@ -30625,12 +30707,12 @@
           <a:effectLst/>
           <a:extLst>
             <a:ext uri="{909E8E84-426E-40dd-AFC4-6F175D3DCCD1}">
-              <a14:hiddenFill xmlns:a14="http://schemas.microsoft.com/office/drawing/2010/main" xmlns="">
+              <a14:hiddenFill xmlns="" xmlns:a14="http://schemas.microsoft.com/office/drawing/2010/main">
                 <a:noFill/>
               </a14:hiddenFill>
             </a:ext>
             <a:ext uri="{AF507438-7753-43e0-B8FC-AC1667EBCBE1}">
-              <a14:hiddenEffects xmlns:a14="http://schemas.microsoft.com/office/drawing/2010/main" xmlns="">
+              <a14:hiddenEffects xmlns="" xmlns:a14="http://schemas.microsoft.com/office/drawing/2010/main">
                 <a:effectLst>
                   <a:outerShdw blurRad="63500" dist="38099" dir="2700000" algn="ctr" rotWithShape="0">
                     <a:schemeClr val="bg2">
@@ -30734,12 +30816,12 @@
             <a:effectLst/>
             <a:extLst>
               <a:ext uri="{909E8E84-426E-40dd-AFC4-6F175D3DCCD1}">
-                <a14:hiddenFill xmlns:a14="http://schemas.microsoft.com/office/drawing/2010/main" xmlns="">
+                <a14:hiddenFill xmlns="" xmlns:a14="http://schemas.microsoft.com/office/drawing/2010/main">
                   <a:noFill/>
                 </a14:hiddenFill>
               </a:ext>
               <a:ext uri="{AF507438-7753-43e0-B8FC-AC1667EBCBE1}">
-                <a14:hiddenEffects xmlns:a14="http://schemas.microsoft.com/office/drawing/2010/main" xmlns="">
+                <a14:hiddenEffects xmlns="" xmlns:a14="http://schemas.microsoft.com/office/drawing/2010/main">
                   <a:effectLst>
                     <a:outerShdw blurRad="63500" dist="38099" dir="2700000" algn="ctr" rotWithShape="0">
                       <a:schemeClr val="bg2">
@@ -30820,7 +30902,7 @@
             <a:effectLst/>
             <a:extLst>
               <a:ext uri="{91240B29-F687-4f45-9708-019B960494DF}">
-                <a14:hiddenLine xmlns:a14="http://schemas.microsoft.com/office/drawing/2010/main" xmlns="" w="9525">
+                <a14:hiddenLine xmlns="" xmlns:a14="http://schemas.microsoft.com/office/drawing/2010/main" w="9525">
                   <a:solidFill>
                     <a:schemeClr val="tx1"/>
                   </a:solidFill>
@@ -30830,7 +30912,7 @@
                 </a14:hiddenLine>
               </a:ext>
               <a:ext uri="{AF507438-7753-43e0-B8FC-AC1667EBCBE1}">
-                <a14:hiddenEffects xmlns:a14="http://schemas.microsoft.com/office/drawing/2010/main" xmlns="">
+                <a14:hiddenEffects xmlns="" xmlns:a14="http://schemas.microsoft.com/office/drawing/2010/main">
                   <a:effectLst>
                     <a:outerShdw blurRad="63500" dist="38099" dir="2700000" algn="ctr" rotWithShape="0">
                       <a:schemeClr val="bg2">
@@ -30909,14 +30991,14 @@
             <a:effectLst/>
             <a:extLst>
               <a:ext uri="{909E8E84-426E-40dd-AFC4-6F175D3DCCD1}">
-                <a14:hiddenFill xmlns:a14="http://schemas.microsoft.com/office/drawing/2010/main" xmlns="">
+                <a14:hiddenFill xmlns="" xmlns:a14="http://schemas.microsoft.com/office/drawing/2010/main">
                   <a:solidFill>
                     <a:srgbClr val="FFFFFF"/>
                   </a:solidFill>
                 </a14:hiddenFill>
               </a:ext>
               <a:ext uri="{91240B29-F687-4f45-9708-019B960494DF}">
-                <a14:hiddenLine xmlns:a14="http://schemas.microsoft.com/office/drawing/2010/main" xmlns="" w="9525">
+                <a14:hiddenLine xmlns="" xmlns:a14="http://schemas.microsoft.com/office/drawing/2010/main" w="9525">
                   <a:solidFill>
                     <a:schemeClr val="tx1"/>
                   </a:solidFill>
@@ -30926,7 +31008,7 @@
                 </a14:hiddenLine>
               </a:ext>
               <a:ext uri="{AF507438-7753-43e0-B8FC-AC1667EBCBE1}">
-                <a14:hiddenEffects xmlns:a14="http://schemas.microsoft.com/office/drawing/2010/main" xmlns="">
+                <a14:hiddenEffects xmlns="" xmlns:a14="http://schemas.microsoft.com/office/drawing/2010/main">
                   <a:effectLst>
                     <a:outerShdw blurRad="63500" dist="38099" dir="2700000" algn="ctr" rotWithShape="0">
                       <a:schemeClr val="bg2">
@@ -31142,12 +31224,12 @@
             <a:effectLst/>
             <a:extLst>
               <a:ext uri="{909E8E84-426E-40dd-AFC4-6F175D3DCCD1}">
-                <a14:hiddenFill xmlns:a14="http://schemas.microsoft.com/office/drawing/2010/main" xmlns="">
+                <a14:hiddenFill xmlns="" xmlns:a14="http://schemas.microsoft.com/office/drawing/2010/main">
                   <a:noFill/>
                 </a14:hiddenFill>
               </a:ext>
               <a:ext uri="{AF507438-7753-43e0-B8FC-AC1667EBCBE1}">
-                <a14:hiddenEffects xmlns:a14="http://schemas.microsoft.com/office/drawing/2010/main" xmlns="">
+                <a14:hiddenEffects xmlns="" xmlns:a14="http://schemas.microsoft.com/office/drawing/2010/main">
                   <a:effectLst>
                     <a:outerShdw blurRad="63500" dist="38099" dir="2700000" algn="ctr" rotWithShape="0">
                       <a:schemeClr val="bg2">
@@ -31228,7 +31310,7 @@
             <a:effectLst/>
             <a:extLst>
               <a:ext uri="{91240B29-F687-4f45-9708-019B960494DF}">
-                <a14:hiddenLine xmlns:a14="http://schemas.microsoft.com/office/drawing/2010/main" xmlns="" w="9525">
+                <a14:hiddenLine xmlns="" xmlns:a14="http://schemas.microsoft.com/office/drawing/2010/main" w="9525">
                   <a:solidFill>
                     <a:schemeClr val="tx1"/>
                   </a:solidFill>
@@ -31238,7 +31320,7 @@
                 </a14:hiddenLine>
               </a:ext>
               <a:ext uri="{AF507438-7753-43e0-B8FC-AC1667EBCBE1}">
-                <a14:hiddenEffects xmlns:a14="http://schemas.microsoft.com/office/drawing/2010/main" xmlns="">
+                <a14:hiddenEffects xmlns="" xmlns:a14="http://schemas.microsoft.com/office/drawing/2010/main">
                   <a:effectLst>
                     <a:outerShdw blurRad="63500" dist="38099" dir="2700000" algn="ctr" rotWithShape="0">
                       <a:schemeClr val="bg2">
@@ -31317,14 +31399,14 @@
             <a:effectLst/>
             <a:extLst>
               <a:ext uri="{909E8E84-426E-40dd-AFC4-6F175D3DCCD1}">
-                <a14:hiddenFill xmlns:a14="http://schemas.microsoft.com/office/drawing/2010/main" xmlns="">
+                <a14:hiddenFill xmlns="" xmlns:a14="http://schemas.microsoft.com/office/drawing/2010/main">
                   <a:solidFill>
                     <a:srgbClr val="FFFFFF"/>
                   </a:solidFill>
                 </a14:hiddenFill>
               </a:ext>
               <a:ext uri="{91240B29-F687-4f45-9708-019B960494DF}">
-                <a14:hiddenLine xmlns:a14="http://schemas.microsoft.com/office/drawing/2010/main" xmlns="" w="9525">
+                <a14:hiddenLine xmlns="" xmlns:a14="http://schemas.microsoft.com/office/drawing/2010/main" w="9525">
                   <a:solidFill>
                     <a:schemeClr val="tx1"/>
                   </a:solidFill>
@@ -31334,7 +31416,7 @@
                 </a14:hiddenLine>
               </a:ext>
               <a:ext uri="{AF507438-7753-43e0-B8FC-AC1667EBCBE1}">
-                <a14:hiddenEffects xmlns:a14="http://schemas.microsoft.com/office/drawing/2010/main" xmlns="">
+                <a14:hiddenEffects xmlns="" xmlns:a14="http://schemas.microsoft.com/office/drawing/2010/main">
                   <a:effectLst>
                     <a:outerShdw blurRad="63500" dist="38099" dir="2700000" algn="ctr" rotWithShape="0">
                       <a:schemeClr val="bg2">
@@ -31538,14 +31620,14 @@
             <a:effectLst/>
             <a:extLst>
               <a:ext uri="{909E8E84-426E-40dd-AFC4-6F175D3DCCD1}">
-                <a14:hiddenFill xmlns:a14="http://schemas.microsoft.com/office/drawing/2010/main" xmlns="">
+                <a14:hiddenFill xmlns="" xmlns:a14="http://schemas.microsoft.com/office/drawing/2010/main">
                   <a:solidFill>
                     <a:schemeClr val="accent1"/>
                   </a:solidFill>
                 </a14:hiddenFill>
               </a:ext>
               <a:ext uri="{91240B29-F687-4f45-9708-019B960494DF}">
-                <a14:hiddenLine xmlns:a14="http://schemas.microsoft.com/office/drawing/2010/main" xmlns="" w="9525">
+                <a14:hiddenLine xmlns="" xmlns:a14="http://schemas.microsoft.com/office/drawing/2010/main" w="9525">
                   <a:solidFill>
                     <a:schemeClr val="tx1"/>
                   </a:solidFill>
@@ -31555,7 +31637,7 @@
                 </a14:hiddenLine>
               </a:ext>
               <a:ext uri="{AF507438-7753-43e0-B8FC-AC1667EBCBE1}">
-                <a14:hiddenEffects xmlns:a14="http://schemas.microsoft.com/office/drawing/2010/main" xmlns="">
+                <a14:hiddenEffects xmlns="" xmlns:a14="http://schemas.microsoft.com/office/drawing/2010/main">
                   <a:effectLst>
                     <a:outerShdw blurRad="63500" dist="38099" dir="2700000" algn="ctr" rotWithShape="0">
                       <a:schemeClr val="bg2">
@@ -31771,12 +31853,12 @@
             <a:effectLst/>
             <a:extLst>
               <a:ext uri="{909E8E84-426E-40dd-AFC4-6F175D3DCCD1}">
-                <a14:hiddenFill xmlns:a14="http://schemas.microsoft.com/office/drawing/2010/main" xmlns="">
+                <a14:hiddenFill xmlns="" xmlns:a14="http://schemas.microsoft.com/office/drawing/2010/main">
                   <a:noFill/>
                 </a14:hiddenFill>
               </a:ext>
               <a:ext uri="{AF507438-7753-43e0-B8FC-AC1667EBCBE1}">
-                <a14:hiddenEffects xmlns:a14="http://schemas.microsoft.com/office/drawing/2010/main" xmlns="">
+                <a14:hiddenEffects xmlns="" xmlns:a14="http://schemas.microsoft.com/office/drawing/2010/main">
                   <a:effectLst>
                     <a:outerShdw blurRad="63500" dist="38099" dir="2700000" algn="ctr" rotWithShape="0">
                       <a:schemeClr val="bg2">
@@ -31857,7 +31939,7 @@
             <a:effectLst/>
             <a:extLst>
               <a:ext uri="{91240B29-F687-4f45-9708-019B960494DF}">
-                <a14:hiddenLine xmlns:a14="http://schemas.microsoft.com/office/drawing/2010/main" xmlns="" w="9525">
+                <a14:hiddenLine xmlns="" xmlns:a14="http://schemas.microsoft.com/office/drawing/2010/main" w="9525">
                   <a:solidFill>
                     <a:schemeClr val="tx1"/>
                   </a:solidFill>
@@ -31867,7 +31949,7 @@
                 </a14:hiddenLine>
               </a:ext>
               <a:ext uri="{AF507438-7753-43e0-B8FC-AC1667EBCBE1}">
-                <a14:hiddenEffects xmlns:a14="http://schemas.microsoft.com/office/drawing/2010/main" xmlns="">
+                <a14:hiddenEffects xmlns="" xmlns:a14="http://schemas.microsoft.com/office/drawing/2010/main">
                   <a:effectLst>
                     <a:outerShdw blurRad="63500" dist="38099" dir="2700000" algn="ctr" rotWithShape="0">
                       <a:schemeClr val="bg2">
@@ -31946,14 +32028,14 @@
             <a:effectLst/>
             <a:extLst>
               <a:ext uri="{909E8E84-426E-40dd-AFC4-6F175D3DCCD1}">
-                <a14:hiddenFill xmlns:a14="http://schemas.microsoft.com/office/drawing/2010/main" xmlns="">
+                <a14:hiddenFill xmlns="" xmlns:a14="http://schemas.microsoft.com/office/drawing/2010/main">
                   <a:solidFill>
                     <a:srgbClr val="FFFFFF"/>
                   </a:solidFill>
                 </a14:hiddenFill>
               </a:ext>
               <a:ext uri="{91240B29-F687-4f45-9708-019B960494DF}">
-                <a14:hiddenLine xmlns:a14="http://schemas.microsoft.com/office/drawing/2010/main" xmlns="" w="9525">
+                <a14:hiddenLine xmlns="" xmlns:a14="http://schemas.microsoft.com/office/drawing/2010/main" w="9525">
                   <a:solidFill>
                     <a:schemeClr val="tx1"/>
                   </a:solidFill>
@@ -31963,7 +32045,7 @@
                 </a14:hiddenLine>
               </a:ext>
               <a:ext uri="{AF507438-7753-43e0-B8FC-AC1667EBCBE1}">
-                <a14:hiddenEffects xmlns:a14="http://schemas.microsoft.com/office/drawing/2010/main" xmlns="">
+                <a14:hiddenEffects xmlns="" xmlns:a14="http://schemas.microsoft.com/office/drawing/2010/main">
                   <a:effectLst>
                     <a:outerShdw blurRad="63500" dist="38099" dir="2700000" algn="ctr" rotWithShape="0">
                       <a:schemeClr val="bg2">
@@ -32188,14 +32270,14 @@
             <a:effectLst/>
             <a:extLst>
               <a:ext uri="{909E8E84-426E-40dd-AFC4-6F175D3DCCD1}">
-                <a14:hiddenFill xmlns:a14="http://schemas.microsoft.com/office/drawing/2010/main" xmlns="">
+                <a14:hiddenFill xmlns="" xmlns:a14="http://schemas.microsoft.com/office/drawing/2010/main">
                   <a:solidFill>
                     <a:schemeClr val="accent1"/>
                   </a:solidFill>
                 </a14:hiddenFill>
               </a:ext>
               <a:ext uri="{91240B29-F687-4f45-9708-019B960494DF}">
-                <a14:hiddenLine xmlns:a14="http://schemas.microsoft.com/office/drawing/2010/main" xmlns="" w="9525">
+                <a14:hiddenLine xmlns="" xmlns:a14="http://schemas.microsoft.com/office/drawing/2010/main" w="9525">
                   <a:solidFill>
                     <a:schemeClr val="tx1"/>
                   </a:solidFill>
@@ -32205,7 +32287,7 @@
                 </a14:hiddenLine>
               </a:ext>
               <a:ext uri="{AF507438-7753-43e0-B8FC-AC1667EBCBE1}">
-                <a14:hiddenEffects xmlns:a14="http://schemas.microsoft.com/office/drawing/2010/main" xmlns="">
+                <a14:hiddenEffects xmlns="" xmlns:a14="http://schemas.microsoft.com/office/drawing/2010/main">
                   <a:effectLst>
                     <a:outerShdw blurRad="63500" dist="38099" dir="2700000" algn="ctr" rotWithShape="0">
                       <a:schemeClr val="bg2">
@@ -32422,12 +32504,12 @@
               <a:effectLst/>
               <a:extLst>
                 <a:ext uri="{909E8E84-426E-40dd-AFC4-6F175D3DCCD1}">
-                  <a14:hiddenFill xmlns:a14="http://schemas.microsoft.com/office/drawing/2010/main" xmlns="">
+                  <a14:hiddenFill xmlns="" xmlns:a14="http://schemas.microsoft.com/office/drawing/2010/main">
                     <a:noFill/>
                   </a14:hiddenFill>
                 </a:ext>
                 <a:ext uri="{AF507438-7753-43e0-B8FC-AC1667EBCBE1}">
-                  <a14:hiddenEffects xmlns:a14="http://schemas.microsoft.com/office/drawing/2010/main" xmlns="">
+                  <a14:hiddenEffects xmlns="" xmlns:a14="http://schemas.microsoft.com/office/drawing/2010/main">
                     <a:effectLst>
                       <a:outerShdw blurRad="63500" dist="38099" dir="2700000" algn="ctr" rotWithShape="0">
                         <a:schemeClr val="bg2">
@@ -32511,12 +32593,12 @@
               <a:effectLst/>
               <a:extLst>
                 <a:ext uri="{909E8E84-426E-40dd-AFC4-6F175D3DCCD1}">
-                  <a14:hiddenFill xmlns:a14="http://schemas.microsoft.com/office/drawing/2010/main" xmlns="">
+                  <a14:hiddenFill xmlns="" xmlns:a14="http://schemas.microsoft.com/office/drawing/2010/main">
                     <a:noFill/>
                   </a14:hiddenFill>
                 </a:ext>
                 <a:ext uri="{AF507438-7753-43e0-B8FC-AC1667EBCBE1}">
-                  <a14:hiddenEffects xmlns:a14="http://schemas.microsoft.com/office/drawing/2010/main" xmlns="">
+                  <a14:hiddenEffects xmlns="" xmlns:a14="http://schemas.microsoft.com/office/drawing/2010/main">
                     <a:effectLst>
                       <a:outerShdw blurRad="63500" dist="38099" dir="2700000" algn="ctr" rotWithShape="0">
                         <a:schemeClr val="bg2">
@@ -32623,12 +32705,12 @@
               <a:effectLst/>
               <a:extLst>
                 <a:ext uri="{909E8E84-426E-40dd-AFC4-6F175D3DCCD1}">
-                  <a14:hiddenFill xmlns:a14="http://schemas.microsoft.com/office/drawing/2010/main" xmlns="">
+                  <a14:hiddenFill xmlns="" xmlns:a14="http://schemas.microsoft.com/office/drawing/2010/main">
                     <a:noFill/>
                   </a14:hiddenFill>
                 </a:ext>
                 <a:ext uri="{AF507438-7753-43e0-B8FC-AC1667EBCBE1}">
-                  <a14:hiddenEffects xmlns:a14="http://schemas.microsoft.com/office/drawing/2010/main" xmlns="">
+                  <a14:hiddenEffects xmlns="" xmlns:a14="http://schemas.microsoft.com/office/drawing/2010/main">
                     <a:effectLst>
                       <a:outerShdw blurRad="63500" dist="38099" dir="2700000" algn="ctr" rotWithShape="0">
                         <a:schemeClr val="bg2">
@@ -32712,12 +32794,12 @@
               <a:effectLst/>
               <a:extLst>
                 <a:ext uri="{909E8E84-426E-40dd-AFC4-6F175D3DCCD1}">
-                  <a14:hiddenFill xmlns:a14="http://schemas.microsoft.com/office/drawing/2010/main" xmlns="">
+                  <a14:hiddenFill xmlns="" xmlns:a14="http://schemas.microsoft.com/office/drawing/2010/main">
                     <a:noFill/>
                   </a14:hiddenFill>
                 </a:ext>
                 <a:ext uri="{AF507438-7753-43e0-B8FC-AC1667EBCBE1}">
-                  <a14:hiddenEffects xmlns:a14="http://schemas.microsoft.com/office/drawing/2010/main" xmlns="">
+                  <a14:hiddenEffects xmlns="" xmlns:a14="http://schemas.microsoft.com/office/drawing/2010/main">
                     <a:effectLst>
                       <a:outerShdw blurRad="63500" dist="38099" dir="2700000" algn="ctr" rotWithShape="0">
                         <a:schemeClr val="bg2">
@@ -33243,8 +33325,8 @@
           </p:txBody>
         </p:sp>
       </p:grpSp>
-      <mc:AlternateContent xmlns:mc="http://schemas.openxmlformats.org/markup-compatibility/2006">
-        <mc:Choice xmlns:p14="http://schemas.microsoft.com/office/powerpoint/2010/main" Requires="p14">
+      <mc:AlternateContent xmlns:mc="http://schemas.openxmlformats.org/markup-compatibility/2006" xmlns:p14="http://schemas.microsoft.com/office/powerpoint/2010/main">
+        <mc:Choice Requires="p14">
           <p:contentPart p14:bwMode="auto" r:id="rId3">
             <p14:nvContentPartPr>
               <p14:cNvPr id="45" name="Ink 44">
@@ -33263,7 +33345,7 @@
             </p14:xfrm>
           </p:contentPart>
         </mc:Choice>
-        <mc:Fallback>
+        <mc:Fallback xmlns="">
           <p:pic>
             <p:nvPicPr>
               <p:cNvPr id="45" name="Ink 44">
@@ -33294,8 +33376,8 @@
           </p:pic>
         </mc:Fallback>
       </mc:AlternateContent>
-      <mc:AlternateContent xmlns:mc="http://schemas.openxmlformats.org/markup-compatibility/2006">
-        <mc:Choice xmlns:p14="http://schemas.microsoft.com/office/powerpoint/2010/main" Requires="p14">
+      <mc:AlternateContent xmlns:mc="http://schemas.openxmlformats.org/markup-compatibility/2006" xmlns:p14="http://schemas.microsoft.com/office/powerpoint/2010/main">
+        <mc:Choice Requires="p14">
           <p:contentPart p14:bwMode="auto" r:id="rId5">
             <p14:nvContentPartPr>
               <p14:cNvPr id="46" name="Ink 45">
@@ -33314,7 +33396,7 @@
             </p14:xfrm>
           </p:contentPart>
         </mc:Choice>
-        <mc:Fallback>
+        <mc:Fallback xmlns="">
           <p:pic>
             <p:nvPicPr>
               <p:cNvPr id="46" name="Ink 45">
@@ -33345,8 +33427,8 @@
           </p:pic>
         </mc:Fallback>
       </mc:AlternateContent>
-      <mc:AlternateContent xmlns:mc="http://schemas.openxmlformats.org/markup-compatibility/2006">
-        <mc:Choice xmlns:p14="http://schemas.microsoft.com/office/powerpoint/2010/main" Requires="p14">
+      <mc:AlternateContent xmlns:mc="http://schemas.openxmlformats.org/markup-compatibility/2006" xmlns:p14="http://schemas.microsoft.com/office/powerpoint/2010/main">
+        <mc:Choice Requires="p14">
           <p:contentPart p14:bwMode="auto" r:id="rId6">
             <p14:nvContentPartPr>
               <p14:cNvPr id="47" name="Ink 46">
@@ -33365,7 +33447,7 @@
             </p14:xfrm>
           </p:contentPart>
         </mc:Choice>
-        <mc:Fallback>
+        <mc:Fallback xmlns="">
           <p:pic>
             <p:nvPicPr>
               <p:cNvPr id="47" name="Ink 46">
@@ -33450,12 +33532,12 @@
             <a:effectLst/>
             <a:extLst>
               <a:ext uri="{909E8E84-426E-40dd-AFC4-6F175D3DCCD1}">
-                <a14:hiddenFill xmlns:a14="http://schemas.microsoft.com/office/drawing/2010/main" xmlns="">
+                <a14:hiddenFill xmlns="" xmlns:a14="http://schemas.microsoft.com/office/drawing/2010/main">
                   <a:noFill/>
                 </a14:hiddenFill>
               </a:ext>
               <a:ext uri="{AF507438-7753-43e0-B8FC-AC1667EBCBE1}">
-                <a14:hiddenEffects xmlns:a14="http://schemas.microsoft.com/office/drawing/2010/main" xmlns="">
+                <a14:hiddenEffects xmlns="" xmlns:a14="http://schemas.microsoft.com/office/drawing/2010/main">
                   <a:effectLst>
                     <a:outerShdw blurRad="63500" dist="38099" dir="2700000" algn="ctr" rotWithShape="0">
                       <a:schemeClr val="bg2">
@@ -33536,7 +33618,7 @@
             <a:effectLst/>
             <a:extLst>
               <a:ext uri="{91240B29-F687-4f45-9708-019B960494DF}">
-                <a14:hiddenLine xmlns:a14="http://schemas.microsoft.com/office/drawing/2010/main" xmlns="" w="9525">
+                <a14:hiddenLine xmlns="" xmlns:a14="http://schemas.microsoft.com/office/drawing/2010/main" w="9525">
                   <a:solidFill>
                     <a:schemeClr val="tx1"/>
                   </a:solidFill>
@@ -33546,7 +33628,7 @@
                 </a14:hiddenLine>
               </a:ext>
               <a:ext uri="{AF507438-7753-43e0-B8FC-AC1667EBCBE1}">
-                <a14:hiddenEffects xmlns:a14="http://schemas.microsoft.com/office/drawing/2010/main" xmlns="">
+                <a14:hiddenEffects xmlns="" xmlns:a14="http://schemas.microsoft.com/office/drawing/2010/main">
                   <a:effectLst>
                     <a:outerShdw blurRad="63500" dist="38099" dir="2700000" algn="ctr" rotWithShape="0">
                       <a:schemeClr val="bg2">
@@ -33625,14 +33707,14 @@
             <a:effectLst/>
             <a:extLst>
               <a:ext uri="{909E8E84-426E-40dd-AFC4-6F175D3DCCD1}">
-                <a14:hiddenFill xmlns:a14="http://schemas.microsoft.com/office/drawing/2010/main" xmlns="">
+                <a14:hiddenFill xmlns="" xmlns:a14="http://schemas.microsoft.com/office/drawing/2010/main">
                   <a:solidFill>
                     <a:srgbClr val="FFFFFF"/>
                   </a:solidFill>
                 </a14:hiddenFill>
               </a:ext>
               <a:ext uri="{91240B29-F687-4f45-9708-019B960494DF}">
-                <a14:hiddenLine xmlns:a14="http://schemas.microsoft.com/office/drawing/2010/main" xmlns="" w="9525">
+                <a14:hiddenLine xmlns="" xmlns:a14="http://schemas.microsoft.com/office/drawing/2010/main" w="9525">
                   <a:solidFill>
                     <a:schemeClr val="tx1"/>
                   </a:solidFill>
@@ -33642,7 +33724,7 @@
                 </a14:hiddenLine>
               </a:ext>
               <a:ext uri="{AF507438-7753-43e0-B8FC-AC1667EBCBE1}">
-                <a14:hiddenEffects xmlns:a14="http://schemas.microsoft.com/office/drawing/2010/main" xmlns="">
+                <a14:hiddenEffects xmlns="" xmlns:a14="http://schemas.microsoft.com/office/drawing/2010/main">
                   <a:effectLst>
                     <a:outerShdw blurRad="63500" dist="38099" dir="2700000" algn="ctr" rotWithShape="0">
                       <a:schemeClr val="bg2">
@@ -33818,8 +33900,8 @@
           </p:txBody>
         </p:sp>
       </p:grpSp>
-      <mc:AlternateContent xmlns:mc="http://schemas.openxmlformats.org/markup-compatibility/2006">
-        <mc:Choice xmlns:p14="http://schemas.microsoft.com/office/powerpoint/2010/main" Requires="p14">
+      <mc:AlternateContent xmlns:mc="http://schemas.openxmlformats.org/markup-compatibility/2006" xmlns:p14="http://schemas.microsoft.com/office/powerpoint/2010/main">
+        <mc:Choice Requires="p14">
           <p:contentPart p14:bwMode="auto" r:id="rId7">
             <p14:nvContentPartPr>
               <p14:cNvPr id="52" name="Ink 51">
@@ -33838,7 +33920,7 @@
             </p14:xfrm>
           </p:contentPart>
         </mc:Choice>
-        <mc:Fallback>
+        <mc:Fallback xmlns="">
           <p:pic>
             <p:nvPicPr>
               <p:cNvPr id="52" name="Ink 51">
@@ -33869,8 +33951,8 @@
           </p:pic>
         </mc:Fallback>
       </mc:AlternateContent>
-      <mc:AlternateContent xmlns:mc="http://schemas.openxmlformats.org/markup-compatibility/2006">
-        <mc:Choice xmlns:p14="http://schemas.microsoft.com/office/powerpoint/2010/main" Requires="p14">
+      <mc:AlternateContent xmlns:mc="http://schemas.openxmlformats.org/markup-compatibility/2006" xmlns:p14="http://schemas.microsoft.com/office/powerpoint/2010/main">
+        <mc:Choice Requires="p14">
           <p:contentPart p14:bwMode="auto" r:id="rId8">
             <p14:nvContentPartPr>
               <p14:cNvPr id="53" name="Ink 52">
@@ -33889,7 +33971,7 @@
             </p14:xfrm>
           </p:contentPart>
         </mc:Choice>
-        <mc:Fallback>
+        <mc:Fallback xmlns="">
           <p:pic>
             <p:nvPicPr>
               <p:cNvPr id="53" name="Ink 52">
@@ -33920,8 +34002,8 @@
           </p:pic>
         </mc:Fallback>
       </mc:AlternateContent>
-      <mc:AlternateContent xmlns:mc="http://schemas.openxmlformats.org/markup-compatibility/2006">
-        <mc:Choice xmlns:p14="http://schemas.microsoft.com/office/powerpoint/2010/main" Requires="p14">
+      <mc:AlternateContent xmlns:mc="http://schemas.openxmlformats.org/markup-compatibility/2006" xmlns:p14="http://schemas.microsoft.com/office/powerpoint/2010/main">
+        <mc:Choice Requires="p14">
           <p:contentPart p14:bwMode="auto" r:id="rId9">
             <p14:nvContentPartPr>
               <p14:cNvPr id="54" name="Ink 53">
@@ -33940,7 +34022,7 @@
             </p14:xfrm>
           </p:contentPart>
         </mc:Choice>
-        <mc:Fallback>
+        <mc:Fallback xmlns="">
           <p:pic>
             <p:nvPicPr>
               <p:cNvPr id="54" name="Ink 53">
@@ -35738,7 +35820,19 @@
             </a:pPr>
             <a:r>
               <a:rPr lang="en-US" altLang="zh-CN" sz="1400" dirty="0"/>
-              <a:t>Consider a sender sending 1000B of data to a receiver over TCP. The sender sends packets of 100B, the window size is 300B, and the ISN is 99 (so D100 is the first packet sent, then D200, and so on).</a:t>
+              <a:t>Consider a sender sending 1000B of data to a receiver over TCP. </a:t>
+            </a:r>
+            <a:r>
+              <a:rPr lang="en-US" altLang="zh-CN" sz="1400" dirty="0">
+                <a:solidFill>
+                  <a:srgbClr val="C00000"/>
+                </a:solidFill>
+              </a:rPr>
+              <a:t>The sender sends packets of 100B, the window size is 300B, </a:t>
+            </a:r>
+            <a:r>
+              <a:rPr lang="en-US" altLang="zh-CN" sz="1400" dirty="0"/>
+              <a:t>and the ISN is 99 (so D100 is the first packet sent, then D200, and so on).</a:t>
             </a:r>
             <a:endParaRPr lang="zh-CN" altLang="zh-CN" sz="1400" dirty="0"/>
           </a:p>
@@ -35748,7 +35842,19 @@
             </a:pPr>
             <a:r>
               <a:rPr lang="en-US" altLang="zh-CN" sz="1400" dirty="0"/>
-              <a:t>Remember, TCP uses a sliding window and retransmits the packet containing the next expected byte on a timeout or, if TCP Fast Retransmit is enabled, when three duplicate acks are received. Assume here that TCP Fast Retransmit is not enabled. The initial transmission of </a:t>
+              <a:t>Remember, TCP uses a sliding window and retransmits the packet containing the next expected byte on a timeout or, if TCP </a:t>
+            </a:r>
+            <a:r>
+              <a:rPr lang="en-US" altLang="zh-CN" sz="1400" dirty="0">
+                <a:solidFill>
+                  <a:srgbClr val="C00000"/>
+                </a:solidFill>
+              </a:rPr>
+              <a:t>Fast Retransmit is enabled, when three duplicate acks are received</a:t>
+            </a:r>
+            <a:r>
+              <a:rPr lang="en-US" altLang="zh-CN" sz="1400" dirty="0"/>
+              <a:t>. Assume here that TCP Fast Retransmit is not enabled. The initial transmission of </a:t>
             </a:r>
             <a:r>
               <a:rPr lang="en-US" altLang="zh-CN" sz="1400" dirty="0">
@@ -36704,7 +36810,19 @@
             </a:pPr>
             <a:r>
               <a:rPr lang="en-US" altLang="zh-CN" dirty="0"/>
-              <a:t>Remember, TCP uses a sliding window and retransmits the packet containing the next expected byte on a timeout or, if TCP Fast Retransmit is enabled, when three duplicate acks are received. Assume here that TCP Fast Retransmit is not enabled. The initial transmission of packets D200 and D700 get dropped.</a:t>
+              <a:t>Remember, TCP uses a sliding window and retransmits the packet containing the next expected byte on a timeout or, if TCP Fast Retransmit is enabled, when three duplicate acks are received. </a:t>
+            </a:r>
+            <a:r>
+              <a:rPr lang="en-US" altLang="zh-CN" dirty="0">
+                <a:solidFill>
+                  <a:srgbClr val="C00000"/>
+                </a:solidFill>
+              </a:rPr>
+              <a:t>Assume here that TCP Fast Retransmit is not enabled. </a:t>
+            </a:r>
+            <a:r>
+              <a:rPr lang="en-US" altLang="zh-CN" dirty="0"/>
+              <a:t>The initial transmission of packets D200 and D700 get dropped.</a:t>
             </a:r>
             <a:endParaRPr lang="zh-CN" altLang="zh-CN" dirty="0"/>
           </a:p>
@@ -36714,7 +36832,19 @@
             </a:pPr>
             <a:r>
               <a:rPr lang="en-US" altLang="zh-CN" dirty="0"/>
-              <a:t>1.1 Fill in the below table with all packets sent by the sender until the receiver has received all packets and the sender knows that. For simplicity, assume that packets (data and ACKs) arrive in order. You may or may not need to fill in all lines.</a:t>
+              <a:t>1.1 Fill in the below table with all packets sent by the sender until the receiver has received all packets and the sender knows that. For simplicity, assume that packets (data and ACKs) arrive in order. </a:t>
+            </a:r>
+            <a:r>
+              <a:rPr lang="en-US" altLang="zh-CN" dirty="0">
+                <a:solidFill>
+                  <a:srgbClr val="C00000"/>
+                </a:solidFill>
+              </a:rPr>
+              <a:t>A packet from sender to receiver arrives and triggers an ACK in the same row; an ACK from receiver to sender arrives at the next row. The table does not contain exact timing information, only sequence information. </a:t>
+            </a:r>
+            <a:r>
+              <a:rPr lang="en-US" altLang="zh-CN" dirty="0"/>
+              <a:t>You may or may not need to fill in all lines.</a:t>
             </a:r>
             <a:endParaRPr lang="zh-CN" altLang="en-US" dirty="0"/>
           </a:p>
@@ -39810,6 +39940,87 @@
           </a:graphicData>
         </a:graphic>
       </p:graphicFrame>
+      <p:sp>
+        <p:nvSpPr>
+          <p:cNvPr id="3" name="Google Shape;998;g36aa5e117e9_3_1368">
+            <a:extLst>
+              <a:ext uri="{FF2B5EF4-FFF2-40B4-BE49-F238E27FC236}">
+                <a16:creationId xmlns:a16="http://schemas.microsoft.com/office/drawing/2014/main" id="{4D629594-DA59-DDE1-EB9C-83C797F9D0FD}"/>
+              </a:ext>
+            </a:extLst>
+          </p:cNvPr>
+          <p:cNvSpPr txBox="1"/>
+          <p:nvPr/>
+        </p:nvSpPr>
+        <p:spPr>
+          <a:xfrm>
+            <a:off x="4566244" y="2301070"/>
+            <a:ext cx="1902103" cy="1261854"/>
+          </a:xfrm>
+          <a:prstGeom prst="rect">
+            <a:avLst/>
+          </a:prstGeom>
+          <a:solidFill>
+            <a:schemeClr val="bg1">
+              <a:lumMod val="85000"/>
+            </a:schemeClr>
+          </a:solidFill>
+          <a:ln/>
+        </p:spPr>
+        <p:style>
+          <a:lnRef idx="1">
+            <a:schemeClr val="dk1"/>
+          </a:lnRef>
+          <a:fillRef idx="2">
+            <a:schemeClr val="dk1"/>
+          </a:fillRef>
+          <a:effectRef idx="1">
+            <a:schemeClr val="dk1"/>
+          </a:effectRef>
+          <a:fontRef idx="minor">
+            <a:schemeClr val="dk1"/>
+          </a:fontRef>
+        </p:style>
+        <p:txBody>
+          <a:bodyPr spcFirstLastPara="1" wrap="square" lIns="91425" tIns="91425" rIns="91425" bIns="91425" anchor="t" anchorCtr="0">
+            <a:spAutoFit/>
+          </a:bodyPr>
+          <a:lstStyle/>
+          <a:p>
+            <a:pPr lvl="0"/>
+            <a:r>
+              <a:rPr lang="en-US" sz="1000" dirty="0">
+                <a:solidFill>
+                  <a:schemeClr val="dk1"/>
+                </a:solidFill>
+                <a:latin typeface="Roboto"/>
+                <a:ea typeface="Roboto"/>
+                <a:cs typeface="Roboto"/>
+                <a:sym typeface="Roboto"/>
+              </a:rPr>
+              <a:t>Here Sender sends D200 upon </a:t>
+            </a:r>
+            <a:r>
+              <a:rPr lang="en-US" sz="1000" dirty="0">
+                <a:latin typeface="Roboto"/>
+                <a:ea typeface="Roboto"/>
+                <a:cs typeface="Roboto"/>
+                <a:sym typeface="Roboto"/>
+              </a:rPr>
+              <a:t>timeout, but with fast retransmit, sender will send D200 when three duplicate acks A200 are received. The table remains the same with or without fast retransmit.</a:t>
+            </a:r>
+            <a:endParaRPr sz="1000" dirty="0">
+              <a:solidFill>
+                <a:schemeClr val="dk1"/>
+              </a:solidFill>
+              <a:latin typeface="Roboto"/>
+              <a:ea typeface="Roboto"/>
+              <a:cs typeface="Roboto"/>
+              <a:sym typeface="Roboto"/>
+            </a:endParaRPr>
+          </a:p>
+        </p:txBody>
+      </p:sp>
     </p:spTree>
   </p:cSld>
   <p:clrMapOvr>
@@ -44664,6 +44875,95 @@
               <a:ea typeface="Lato"/>
               <a:cs typeface="Lato"/>
               <a:sym typeface="Lato"/>
+            </a:endParaRPr>
+          </a:p>
+        </p:txBody>
+      </p:sp>
+      <p:sp>
+        <p:nvSpPr>
+          <p:cNvPr id="6" name="Google Shape;998;g36aa5e117e9_3_1368">
+            <a:extLst>
+              <a:ext uri="{FF2B5EF4-FFF2-40B4-BE49-F238E27FC236}">
+                <a16:creationId xmlns:a16="http://schemas.microsoft.com/office/drawing/2014/main" id="{8920CA8C-82B9-EDE2-E0DA-A0E61C6CC045}"/>
+              </a:ext>
+            </a:extLst>
+          </p:cNvPr>
+          <p:cNvSpPr txBox="1"/>
+          <p:nvPr/>
+        </p:nvSpPr>
+        <p:spPr>
+          <a:xfrm>
+            <a:off x="4572000" y="2642044"/>
+            <a:ext cx="1902103" cy="954077"/>
+          </a:xfrm>
+          <a:prstGeom prst="rect">
+            <a:avLst/>
+          </a:prstGeom>
+          <a:solidFill>
+            <a:schemeClr val="bg1">
+              <a:lumMod val="85000"/>
+            </a:schemeClr>
+          </a:solidFill>
+          <a:ln/>
+        </p:spPr>
+        <p:style>
+          <a:lnRef idx="1">
+            <a:schemeClr val="dk1"/>
+          </a:lnRef>
+          <a:fillRef idx="2">
+            <a:schemeClr val="dk1"/>
+          </a:fillRef>
+          <a:effectRef idx="1">
+            <a:schemeClr val="dk1"/>
+          </a:effectRef>
+          <a:fontRef idx="minor">
+            <a:schemeClr val="dk1"/>
+          </a:fontRef>
+        </p:style>
+        <p:txBody>
+          <a:bodyPr spcFirstLastPara="1" wrap="square" lIns="91425" tIns="91425" rIns="91425" bIns="91425" anchor="t" anchorCtr="0">
+            <a:spAutoFit/>
+          </a:bodyPr>
+          <a:lstStyle/>
+          <a:p>
+            <a:pPr marL="0" lvl="0" indent="0" algn="l" rtl="0">
+              <a:spcBef>
+                <a:spcPts val="0"/>
+              </a:spcBef>
+              <a:spcAft>
+                <a:spcPts val="0"/>
+              </a:spcAft>
+              <a:buNone/>
+            </a:pPr>
+            <a:r>
+              <a:rPr lang="en-US" sz="1000" dirty="0">
+                <a:solidFill>
+                  <a:schemeClr val="dk1"/>
+                </a:solidFill>
+                <a:latin typeface="Roboto"/>
+                <a:ea typeface="Roboto"/>
+                <a:cs typeface="Roboto"/>
+                <a:sym typeface="Roboto"/>
+              </a:rPr>
+              <a:t>Here Sender sends D700 upon </a:t>
+            </a:r>
+            <a:r>
+              <a:rPr lang="en-US" sz="1000" dirty="0">
+                <a:latin typeface="Roboto"/>
+                <a:ea typeface="Roboto"/>
+                <a:cs typeface="Roboto"/>
+                <a:sym typeface="Roboto"/>
+              </a:rPr>
+              <a:t>timeout, but with fast retransmit, sender will send D700 when three duplicate acks A700 are received. </a:t>
+            </a:r>
+            <a:endParaRPr sz="1000" dirty="0">
+              <a:solidFill>
+                <a:schemeClr val="dk1"/>
+              </a:solidFill>
+              <a:latin typeface="Roboto"/>
+              <a:ea typeface="Roboto"/>
+              <a:cs typeface="Roboto"/>
+              <a:sym typeface="Roboto"/>
             </a:endParaRPr>
           </a:p>
         </p:txBody>
@@ -47394,12 +47694,12 @@
             <a:effectLst/>
             <a:extLst>
               <a:ext uri="{909E8E84-426E-40dd-AFC4-6F175D3DCCD1}">
-                <a14:hiddenFill xmlns:a14="http://schemas.microsoft.com/office/drawing/2010/main" xmlns="">
+                <a14:hiddenFill xmlns="" xmlns:a14="http://schemas.microsoft.com/office/drawing/2010/main">
                   <a:noFill/>
                 </a14:hiddenFill>
               </a:ext>
               <a:ext uri="{AF507438-7753-43e0-B8FC-AC1667EBCBE1}">
-                <a14:hiddenEffects xmlns:a14="http://schemas.microsoft.com/office/drawing/2010/main" xmlns="">
+                <a14:hiddenEffects xmlns="" xmlns:a14="http://schemas.microsoft.com/office/drawing/2010/main">
                   <a:effectLst>
                     <a:outerShdw blurRad="63500" dist="38099" dir="2700000" algn="ctr" rotWithShape="0">
                       <a:schemeClr val="bg2">
@@ -47480,7 +47780,7 @@
             <a:effectLst/>
             <a:extLst>
               <a:ext uri="{91240B29-F687-4f45-9708-019B960494DF}">
-                <a14:hiddenLine xmlns:a14="http://schemas.microsoft.com/office/drawing/2010/main" xmlns="" w="9525">
+                <a14:hiddenLine xmlns="" xmlns:a14="http://schemas.microsoft.com/office/drawing/2010/main" w="9525">
                   <a:solidFill>
                     <a:schemeClr val="tx1"/>
                   </a:solidFill>
@@ -47490,7 +47790,7 @@
                 </a14:hiddenLine>
               </a:ext>
               <a:ext uri="{AF507438-7753-43e0-B8FC-AC1667EBCBE1}">
-                <a14:hiddenEffects xmlns:a14="http://schemas.microsoft.com/office/drawing/2010/main" xmlns="">
+                <a14:hiddenEffects xmlns="" xmlns:a14="http://schemas.microsoft.com/office/drawing/2010/main">
                   <a:effectLst>
                     <a:outerShdw blurRad="63500" dist="38099" dir="2700000" algn="ctr" rotWithShape="0">
                       <a:schemeClr val="bg2">
@@ -47569,14 +47869,14 @@
             <a:effectLst/>
             <a:extLst>
               <a:ext uri="{909E8E84-426E-40dd-AFC4-6F175D3DCCD1}">
-                <a14:hiddenFill xmlns:a14="http://schemas.microsoft.com/office/drawing/2010/main" xmlns="">
+                <a14:hiddenFill xmlns="" xmlns:a14="http://schemas.microsoft.com/office/drawing/2010/main">
                   <a:solidFill>
                     <a:srgbClr val="FFFFFF"/>
                   </a:solidFill>
                 </a14:hiddenFill>
               </a:ext>
               <a:ext uri="{91240B29-F687-4f45-9708-019B960494DF}">
-                <a14:hiddenLine xmlns:a14="http://schemas.microsoft.com/office/drawing/2010/main" xmlns="" w="9525">
+                <a14:hiddenLine xmlns="" xmlns:a14="http://schemas.microsoft.com/office/drawing/2010/main" w="9525">
                   <a:solidFill>
                     <a:schemeClr val="tx1"/>
                   </a:solidFill>
@@ -47586,7 +47886,7 @@
                 </a14:hiddenLine>
               </a:ext>
               <a:ext uri="{AF507438-7753-43e0-B8FC-AC1667EBCBE1}">
-                <a14:hiddenEffects xmlns:a14="http://schemas.microsoft.com/office/drawing/2010/main" xmlns="">
+                <a14:hiddenEffects xmlns="" xmlns:a14="http://schemas.microsoft.com/office/drawing/2010/main">
                   <a:effectLst>
                     <a:outerShdw blurRad="63500" dist="38099" dir="2700000" algn="ctr" rotWithShape="0">
                       <a:schemeClr val="bg2">
@@ -47777,14 +48077,14 @@
           <a:effectLst/>
           <a:extLst>
             <a:ext uri="{909E8E84-426E-40dd-AFC4-6F175D3DCCD1}">
-              <a14:hiddenFill xmlns:a14="http://schemas.microsoft.com/office/drawing/2010/main" xmlns="">
+              <a14:hiddenFill xmlns="" xmlns:a14="http://schemas.microsoft.com/office/drawing/2010/main">
                 <a:solidFill>
                   <a:srgbClr val="FFFFFF"/>
                 </a:solidFill>
               </a14:hiddenFill>
             </a:ext>
             <a:ext uri="{91240B29-F687-4f45-9708-019B960494DF}">
-              <a14:hiddenLine xmlns:a14="http://schemas.microsoft.com/office/drawing/2010/main" xmlns="" w="9525">
+              <a14:hiddenLine xmlns="" xmlns:a14="http://schemas.microsoft.com/office/drawing/2010/main" w="9525">
                 <a:solidFill>
                   <a:schemeClr val="tx1"/>
                 </a:solidFill>
@@ -47794,7 +48094,7 @@
               </a14:hiddenLine>
             </a:ext>
             <a:ext uri="{AF507438-7753-43e0-B8FC-AC1667EBCBE1}">
-              <a14:hiddenEffects xmlns:a14="http://schemas.microsoft.com/office/drawing/2010/main" xmlns="">
+              <a14:hiddenEffects xmlns="" xmlns:a14="http://schemas.microsoft.com/office/drawing/2010/main">
                 <a:effectLst>
                   <a:outerShdw blurRad="63500" dist="38099" dir="2700000" algn="ctr" rotWithShape="0">
                     <a:schemeClr val="bg2">
@@ -47984,14 +48284,14 @@
           <a:effectLst/>
           <a:extLst>
             <a:ext uri="{909E8E84-426E-40dd-AFC4-6F175D3DCCD1}">
-              <a14:hiddenFill xmlns:a14="http://schemas.microsoft.com/office/drawing/2010/main" xmlns="">
+              <a14:hiddenFill xmlns="" xmlns:a14="http://schemas.microsoft.com/office/drawing/2010/main">
                 <a:solidFill>
                   <a:srgbClr val="FFFFFF"/>
                 </a:solidFill>
               </a14:hiddenFill>
             </a:ext>
             <a:ext uri="{91240B29-F687-4f45-9708-019B960494DF}">
-              <a14:hiddenLine xmlns:a14="http://schemas.microsoft.com/office/drawing/2010/main" xmlns="" w="9525">
+              <a14:hiddenLine xmlns="" xmlns:a14="http://schemas.microsoft.com/office/drawing/2010/main" w="9525">
                 <a:solidFill>
                   <a:schemeClr val="tx1"/>
                 </a:solidFill>
@@ -48001,7 +48301,7 @@
               </a14:hiddenLine>
             </a:ext>
             <a:ext uri="{AF507438-7753-43e0-B8FC-AC1667EBCBE1}">
-              <a14:hiddenEffects xmlns:a14="http://schemas.microsoft.com/office/drawing/2010/main" xmlns="">
+              <a14:hiddenEffects xmlns="" xmlns:a14="http://schemas.microsoft.com/office/drawing/2010/main">
                 <a:effectLst>
                   <a:outerShdw blurRad="63500" dist="38099" dir="2700000" algn="ctr" rotWithShape="0">
                     <a:schemeClr val="bg2">
@@ -48216,12 +48516,12 @@
             <a:effectLst/>
             <a:extLst>
               <a:ext uri="{909E8E84-426E-40dd-AFC4-6F175D3DCCD1}">
-                <a14:hiddenFill xmlns:a14="http://schemas.microsoft.com/office/drawing/2010/main" xmlns="">
+                <a14:hiddenFill xmlns="" xmlns:a14="http://schemas.microsoft.com/office/drawing/2010/main">
                   <a:noFill/>
                 </a14:hiddenFill>
               </a:ext>
               <a:ext uri="{AF507438-7753-43e0-B8FC-AC1667EBCBE1}">
-                <a14:hiddenEffects xmlns:a14="http://schemas.microsoft.com/office/drawing/2010/main" xmlns="">
+                <a14:hiddenEffects xmlns="" xmlns:a14="http://schemas.microsoft.com/office/drawing/2010/main">
                   <a:effectLst>
                     <a:outerShdw blurRad="63500" dist="38099" dir="2700000" algn="ctr" rotWithShape="0">
                       <a:schemeClr val="bg2">
@@ -48302,7 +48602,7 @@
             <a:effectLst/>
             <a:extLst>
               <a:ext uri="{91240B29-F687-4f45-9708-019B960494DF}">
-                <a14:hiddenLine xmlns:a14="http://schemas.microsoft.com/office/drawing/2010/main" xmlns="" w="9525">
+                <a14:hiddenLine xmlns="" xmlns:a14="http://schemas.microsoft.com/office/drawing/2010/main" w="9525">
                   <a:solidFill>
                     <a:schemeClr val="tx1"/>
                   </a:solidFill>
@@ -48312,7 +48612,7 @@
                 </a14:hiddenLine>
               </a:ext>
               <a:ext uri="{AF507438-7753-43e0-B8FC-AC1667EBCBE1}">
-                <a14:hiddenEffects xmlns:a14="http://schemas.microsoft.com/office/drawing/2010/main" xmlns="">
+                <a14:hiddenEffects xmlns="" xmlns:a14="http://schemas.microsoft.com/office/drawing/2010/main">
                   <a:effectLst>
                     <a:outerShdw blurRad="63500" dist="38099" dir="2700000" algn="ctr" rotWithShape="0">
                       <a:schemeClr val="bg2">
@@ -48391,14 +48691,14 @@
             <a:effectLst/>
             <a:extLst>
               <a:ext uri="{909E8E84-426E-40dd-AFC4-6F175D3DCCD1}">
-                <a14:hiddenFill xmlns:a14="http://schemas.microsoft.com/office/drawing/2010/main" xmlns="">
+                <a14:hiddenFill xmlns="" xmlns:a14="http://schemas.microsoft.com/office/drawing/2010/main">
                   <a:solidFill>
                     <a:srgbClr val="FFFFFF"/>
                   </a:solidFill>
                 </a14:hiddenFill>
               </a:ext>
               <a:ext uri="{91240B29-F687-4f45-9708-019B960494DF}">
-                <a14:hiddenLine xmlns:a14="http://schemas.microsoft.com/office/drawing/2010/main" xmlns="" w="9525">
+                <a14:hiddenLine xmlns="" xmlns:a14="http://schemas.microsoft.com/office/drawing/2010/main" w="9525">
                   <a:solidFill>
                     <a:schemeClr val="tx1"/>
                   </a:solidFill>
@@ -48408,7 +48708,7 @@
                 </a14:hiddenLine>
               </a:ext>
               <a:ext uri="{AF507438-7753-43e0-B8FC-AC1667EBCBE1}">
-                <a14:hiddenEffects xmlns:a14="http://schemas.microsoft.com/office/drawing/2010/main" xmlns="">
+                <a14:hiddenEffects xmlns="" xmlns:a14="http://schemas.microsoft.com/office/drawing/2010/main">
                   <a:effectLst>
                     <a:outerShdw blurRad="63500" dist="38099" dir="2700000" algn="ctr" rotWithShape="0">
                       <a:schemeClr val="bg2">
@@ -48604,12 +48904,12 @@
           <a:effectLst/>
           <a:extLst>
             <a:ext uri="{909E8E84-426E-40dd-AFC4-6F175D3DCCD1}">
-              <a14:hiddenFill xmlns:a14="http://schemas.microsoft.com/office/drawing/2010/main" xmlns="">
+              <a14:hiddenFill xmlns="" xmlns:a14="http://schemas.microsoft.com/office/drawing/2010/main">
                 <a:noFill/>
               </a14:hiddenFill>
             </a:ext>
             <a:ext uri="{AF507438-7753-43e0-B8FC-AC1667EBCBE1}">
-              <a14:hiddenEffects xmlns:a14="http://schemas.microsoft.com/office/drawing/2010/main" xmlns="">
+              <a14:hiddenEffects xmlns="" xmlns:a14="http://schemas.microsoft.com/office/drawing/2010/main">
                 <a:effectLst>
                   <a:outerShdw blurRad="63500" dist="38099" dir="2700000" algn="ctr" rotWithShape="0">
                     <a:schemeClr val="bg2">
@@ -48693,12 +48993,12 @@
           <a:effectLst/>
           <a:extLst>
             <a:ext uri="{909E8E84-426E-40dd-AFC4-6F175D3DCCD1}">
-              <a14:hiddenFill xmlns:a14="http://schemas.microsoft.com/office/drawing/2010/main" xmlns="">
+              <a14:hiddenFill xmlns="" xmlns:a14="http://schemas.microsoft.com/office/drawing/2010/main">
                 <a:noFill/>
               </a14:hiddenFill>
             </a:ext>
             <a:ext uri="{AF507438-7753-43e0-B8FC-AC1667EBCBE1}">
-              <a14:hiddenEffects xmlns:a14="http://schemas.microsoft.com/office/drawing/2010/main" xmlns="">
+              <a14:hiddenEffects xmlns="" xmlns:a14="http://schemas.microsoft.com/office/drawing/2010/main">
                 <a:effectLst>
                   <a:outerShdw blurRad="63500" dist="38099" dir="2700000" algn="ctr" rotWithShape="0">
                     <a:schemeClr val="bg2">
@@ -48802,12 +49102,12 @@
             <a:effectLst/>
             <a:extLst>
               <a:ext uri="{909E8E84-426E-40dd-AFC4-6F175D3DCCD1}">
-                <a14:hiddenFill xmlns:a14="http://schemas.microsoft.com/office/drawing/2010/main" xmlns="">
+                <a14:hiddenFill xmlns="" xmlns:a14="http://schemas.microsoft.com/office/drawing/2010/main">
                   <a:noFill/>
                 </a14:hiddenFill>
               </a:ext>
               <a:ext uri="{AF507438-7753-43e0-B8FC-AC1667EBCBE1}">
-                <a14:hiddenEffects xmlns:a14="http://schemas.microsoft.com/office/drawing/2010/main" xmlns="">
+                <a14:hiddenEffects xmlns="" xmlns:a14="http://schemas.microsoft.com/office/drawing/2010/main">
                   <a:effectLst>
                     <a:outerShdw blurRad="63500" dist="38099" dir="2700000" algn="ctr" rotWithShape="0">
                       <a:schemeClr val="bg2">
@@ -48888,7 +49188,7 @@
             <a:effectLst/>
             <a:extLst>
               <a:ext uri="{91240B29-F687-4f45-9708-019B960494DF}">
-                <a14:hiddenLine xmlns:a14="http://schemas.microsoft.com/office/drawing/2010/main" xmlns="" w="9525">
+                <a14:hiddenLine xmlns="" xmlns:a14="http://schemas.microsoft.com/office/drawing/2010/main" w="9525">
                   <a:solidFill>
                     <a:schemeClr val="tx1"/>
                   </a:solidFill>
@@ -48898,7 +49198,7 @@
                 </a14:hiddenLine>
               </a:ext>
               <a:ext uri="{AF507438-7753-43e0-B8FC-AC1667EBCBE1}">
-                <a14:hiddenEffects xmlns:a14="http://schemas.microsoft.com/office/drawing/2010/main" xmlns="">
+                <a14:hiddenEffects xmlns="" xmlns:a14="http://schemas.microsoft.com/office/drawing/2010/main">
                   <a:effectLst>
                     <a:outerShdw blurRad="63500" dist="38099" dir="2700000" algn="ctr" rotWithShape="0">
                       <a:schemeClr val="bg2">
@@ -48977,14 +49277,14 @@
             <a:effectLst/>
             <a:extLst>
               <a:ext uri="{909E8E84-426E-40dd-AFC4-6F175D3DCCD1}">
-                <a14:hiddenFill xmlns:a14="http://schemas.microsoft.com/office/drawing/2010/main" xmlns="">
+                <a14:hiddenFill xmlns="" xmlns:a14="http://schemas.microsoft.com/office/drawing/2010/main">
                   <a:solidFill>
                     <a:srgbClr val="FFFFFF"/>
                   </a:solidFill>
                 </a14:hiddenFill>
               </a:ext>
               <a:ext uri="{91240B29-F687-4f45-9708-019B960494DF}">
-                <a14:hiddenLine xmlns:a14="http://schemas.microsoft.com/office/drawing/2010/main" xmlns="" w="9525">
+                <a14:hiddenLine xmlns="" xmlns:a14="http://schemas.microsoft.com/office/drawing/2010/main" w="9525">
                   <a:solidFill>
                     <a:schemeClr val="tx1"/>
                   </a:solidFill>
@@ -48994,7 +49294,7 @@
                 </a14:hiddenLine>
               </a:ext>
               <a:ext uri="{AF507438-7753-43e0-B8FC-AC1667EBCBE1}">
-                <a14:hiddenEffects xmlns:a14="http://schemas.microsoft.com/office/drawing/2010/main" xmlns="">
+                <a14:hiddenEffects xmlns="" xmlns:a14="http://schemas.microsoft.com/office/drawing/2010/main">
                   <a:effectLst>
                     <a:outerShdw blurRad="63500" dist="38099" dir="2700000" algn="ctr" rotWithShape="0">
                       <a:schemeClr val="bg2">
@@ -49236,12 +49536,12 @@
             <a:effectLst/>
             <a:extLst>
               <a:ext uri="{909E8E84-426E-40dd-AFC4-6F175D3DCCD1}">
-                <a14:hiddenFill xmlns:a14="http://schemas.microsoft.com/office/drawing/2010/main" xmlns="">
+                <a14:hiddenFill xmlns="" xmlns:a14="http://schemas.microsoft.com/office/drawing/2010/main">
                   <a:noFill/>
                 </a14:hiddenFill>
               </a:ext>
               <a:ext uri="{AF507438-7753-43e0-B8FC-AC1667EBCBE1}">
-                <a14:hiddenEffects xmlns:a14="http://schemas.microsoft.com/office/drawing/2010/main" xmlns="">
+                <a14:hiddenEffects xmlns="" xmlns:a14="http://schemas.microsoft.com/office/drawing/2010/main">
                   <a:effectLst>
                     <a:outerShdw blurRad="63500" dist="38099" dir="2700000" algn="ctr" rotWithShape="0">
                       <a:schemeClr val="bg2">
@@ -49322,7 +49622,7 @@
             <a:effectLst/>
             <a:extLst>
               <a:ext uri="{91240B29-F687-4f45-9708-019B960494DF}">
-                <a14:hiddenLine xmlns:a14="http://schemas.microsoft.com/office/drawing/2010/main" xmlns="" w="9525">
+                <a14:hiddenLine xmlns="" xmlns:a14="http://schemas.microsoft.com/office/drawing/2010/main" w="9525">
                   <a:solidFill>
                     <a:schemeClr val="tx1"/>
                   </a:solidFill>
@@ -49332,7 +49632,7 @@
                 </a14:hiddenLine>
               </a:ext>
               <a:ext uri="{AF507438-7753-43e0-B8FC-AC1667EBCBE1}">
-                <a14:hiddenEffects xmlns:a14="http://schemas.microsoft.com/office/drawing/2010/main" xmlns="">
+                <a14:hiddenEffects xmlns="" xmlns:a14="http://schemas.microsoft.com/office/drawing/2010/main">
                   <a:effectLst>
                     <a:outerShdw blurRad="63500" dist="38099" dir="2700000" algn="ctr" rotWithShape="0">
                       <a:schemeClr val="bg2">
@@ -49411,14 +49711,14 @@
             <a:effectLst/>
             <a:extLst>
               <a:ext uri="{909E8E84-426E-40dd-AFC4-6F175D3DCCD1}">
-                <a14:hiddenFill xmlns:a14="http://schemas.microsoft.com/office/drawing/2010/main" xmlns="">
+                <a14:hiddenFill xmlns="" xmlns:a14="http://schemas.microsoft.com/office/drawing/2010/main">
                   <a:solidFill>
                     <a:srgbClr val="FFFFFF"/>
                   </a:solidFill>
                 </a14:hiddenFill>
               </a:ext>
               <a:ext uri="{91240B29-F687-4f45-9708-019B960494DF}">
-                <a14:hiddenLine xmlns:a14="http://schemas.microsoft.com/office/drawing/2010/main" xmlns="" w="9525">
+                <a14:hiddenLine xmlns="" xmlns:a14="http://schemas.microsoft.com/office/drawing/2010/main" w="9525">
                   <a:solidFill>
                     <a:schemeClr val="tx1"/>
                   </a:solidFill>
@@ -49428,7 +49728,7 @@
                 </a14:hiddenLine>
               </a:ext>
               <a:ext uri="{AF507438-7753-43e0-B8FC-AC1667EBCBE1}">
-                <a14:hiddenEffects xmlns:a14="http://schemas.microsoft.com/office/drawing/2010/main" xmlns="">
+                <a14:hiddenEffects xmlns="" xmlns:a14="http://schemas.microsoft.com/office/drawing/2010/main">
                   <a:effectLst>
                     <a:outerShdw blurRad="63500" dist="38099" dir="2700000" algn="ctr" rotWithShape="0">
                       <a:schemeClr val="bg2">
@@ -49632,14 +49932,14 @@
             <a:effectLst/>
             <a:extLst>
               <a:ext uri="{909E8E84-426E-40dd-AFC4-6F175D3DCCD1}">
-                <a14:hiddenFill xmlns:a14="http://schemas.microsoft.com/office/drawing/2010/main" xmlns="">
+                <a14:hiddenFill xmlns="" xmlns:a14="http://schemas.microsoft.com/office/drawing/2010/main">
                   <a:solidFill>
                     <a:schemeClr val="accent1"/>
                   </a:solidFill>
                 </a14:hiddenFill>
               </a:ext>
               <a:ext uri="{91240B29-F687-4f45-9708-019B960494DF}">
-                <a14:hiddenLine xmlns:a14="http://schemas.microsoft.com/office/drawing/2010/main" xmlns="" w="9525">
+                <a14:hiddenLine xmlns="" xmlns:a14="http://schemas.microsoft.com/office/drawing/2010/main" w="9525">
                   <a:solidFill>
                     <a:schemeClr val="tx1"/>
                   </a:solidFill>
@@ -49649,7 +49949,7 @@
                 </a14:hiddenLine>
               </a:ext>
               <a:ext uri="{AF507438-7753-43e0-B8FC-AC1667EBCBE1}">
-                <a14:hiddenEffects xmlns:a14="http://schemas.microsoft.com/office/drawing/2010/main" xmlns="">
+                <a14:hiddenEffects xmlns="" xmlns:a14="http://schemas.microsoft.com/office/drawing/2010/main">
                   <a:effectLst>
                     <a:outerShdw blurRad="63500" dist="38099" dir="2700000" algn="ctr" rotWithShape="0">
                       <a:schemeClr val="bg2">
@@ -49865,12 +50165,12 @@
             <a:effectLst/>
             <a:extLst>
               <a:ext uri="{909E8E84-426E-40dd-AFC4-6F175D3DCCD1}">
-                <a14:hiddenFill xmlns:a14="http://schemas.microsoft.com/office/drawing/2010/main" xmlns="">
+                <a14:hiddenFill xmlns="" xmlns:a14="http://schemas.microsoft.com/office/drawing/2010/main">
                   <a:noFill/>
                 </a14:hiddenFill>
               </a:ext>
               <a:ext uri="{AF507438-7753-43e0-B8FC-AC1667EBCBE1}">
-                <a14:hiddenEffects xmlns:a14="http://schemas.microsoft.com/office/drawing/2010/main" xmlns="">
+                <a14:hiddenEffects xmlns="" xmlns:a14="http://schemas.microsoft.com/office/drawing/2010/main">
                   <a:effectLst>
                     <a:outerShdw blurRad="63500" dist="38099" dir="2700000" algn="ctr" rotWithShape="0">
                       <a:schemeClr val="bg2">
@@ -49951,7 +50251,7 @@
             <a:effectLst/>
             <a:extLst>
               <a:ext uri="{91240B29-F687-4f45-9708-019B960494DF}">
-                <a14:hiddenLine xmlns:a14="http://schemas.microsoft.com/office/drawing/2010/main" xmlns="" w="9525">
+                <a14:hiddenLine xmlns="" xmlns:a14="http://schemas.microsoft.com/office/drawing/2010/main" w="9525">
                   <a:solidFill>
                     <a:schemeClr val="tx1"/>
                   </a:solidFill>
@@ -49961,7 +50261,7 @@
                 </a14:hiddenLine>
               </a:ext>
               <a:ext uri="{AF507438-7753-43e0-B8FC-AC1667EBCBE1}">
-                <a14:hiddenEffects xmlns:a14="http://schemas.microsoft.com/office/drawing/2010/main" xmlns="">
+                <a14:hiddenEffects xmlns="" xmlns:a14="http://schemas.microsoft.com/office/drawing/2010/main">
                   <a:effectLst>
                     <a:outerShdw blurRad="63500" dist="38099" dir="2700000" algn="ctr" rotWithShape="0">
                       <a:schemeClr val="bg2">
@@ -50040,14 +50340,14 @@
             <a:effectLst/>
             <a:extLst>
               <a:ext uri="{909E8E84-426E-40dd-AFC4-6F175D3DCCD1}">
-                <a14:hiddenFill xmlns:a14="http://schemas.microsoft.com/office/drawing/2010/main" xmlns="">
+                <a14:hiddenFill xmlns="" xmlns:a14="http://schemas.microsoft.com/office/drawing/2010/main">
                   <a:solidFill>
                     <a:srgbClr val="FFFFFF"/>
                   </a:solidFill>
                 </a14:hiddenFill>
               </a:ext>
               <a:ext uri="{91240B29-F687-4f45-9708-019B960494DF}">
-                <a14:hiddenLine xmlns:a14="http://schemas.microsoft.com/office/drawing/2010/main" xmlns="" w="9525">
+                <a14:hiddenLine xmlns="" xmlns:a14="http://schemas.microsoft.com/office/drawing/2010/main" w="9525">
                   <a:solidFill>
                     <a:schemeClr val="tx1"/>
                   </a:solidFill>
@@ -50057,7 +50357,7 @@
                 </a14:hiddenLine>
               </a:ext>
               <a:ext uri="{AF507438-7753-43e0-B8FC-AC1667EBCBE1}">
-                <a14:hiddenEffects xmlns:a14="http://schemas.microsoft.com/office/drawing/2010/main" xmlns="">
+                <a14:hiddenEffects xmlns="" xmlns:a14="http://schemas.microsoft.com/office/drawing/2010/main">
                   <a:effectLst>
                     <a:outerShdw blurRad="63500" dist="38099" dir="2700000" algn="ctr" rotWithShape="0">
                       <a:schemeClr val="bg2">
@@ -50283,14 +50583,14 @@
             <a:effectLst/>
             <a:extLst>
               <a:ext uri="{909E8E84-426E-40dd-AFC4-6F175D3DCCD1}">
-                <a14:hiddenFill xmlns:a14="http://schemas.microsoft.com/office/drawing/2010/main" xmlns="">
+                <a14:hiddenFill xmlns="" xmlns:a14="http://schemas.microsoft.com/office/drawing/2010/main">
                   <a:solidFill>
                     <a:schemeClr val="accent1"/>
                   </a:solidFill>
                 </a14:hiddenFill>
               </a:ext>
               <a:ext uri="{91240B29-F687-4f45-9708-019B960494DF}">
-                <a14:hiddenLine xmlns:a14="http://schemas.microsoft.com/office/drawing/2010/main" xmlns="" w="9525">
+                <a14:hiddenLine xmlns="" xmlns:a14="http://schemas.microsoft.com/office/drawing/2010/main" w="9525">
                   <a:solidFill>
                     <a:schemeClr val="tx1"/>
                   </a:solidFill>
@@ -50300,7 +50600,7 @@
                 </a14:hiddenLine>
               </a:ext>
               <a:ext uri="{AF507438-7753-43e0-B8FC-AC1667EBCBE1}">
-                <a14:hiddenEffects xmlns:a14="http://schemas.microsoft.com/office/drawing/2010/main" xmlns="">
+                <a14:hiddenEffects xmlns="" xmlns:a14="http://schemas.microsoft.com/office/drawing/2010/main">
                   <a:effectLst>
                     <a:outerShdw blurRad="63500" dist="38099" dir="2700000" algn="ctr" rotWithShape="0">
                       <a:schemeClr val="bg2">
@@ -50517,12 +50817,12 @@
               <a:effectLst/>
               <a:extLst>
                 <a:ext uri="{909E8E84-426E-40dd-AFC4-6F175D3DCCD1}">
-                  <a14:hiddenFill xmlns:a14="http://schemas.microsoft.com/office/drawing/2010/main" xmlns="">
+                  <a14:hiddenFill xmlns="" xmlns:a14="http://schemas.microsoft.com/office/drawing/2010/main">
                     <a:noFill/>
                   </a14:hiddenFill>
                 </a:ext>
                 <a:ext uri="{AF507438-7753-43e0-B8FC-AC1667EBCBE1}">
-                  <a14:hiddenEffects xmlns:a14="http://schemas.microsoft.com/office/drawing/2010/main" xmlns="">
+                  <a14:hiddenEffects xmlns="" xmlns:a14="http://schemas.microsoft.com/office/drawing/2010/main">
                     <a:effectLst>
                       <a:outerShdw blurRad="63500" dist="38099" dir="2700000" algn="ctr" rotWithShape="0">
                         <a:schemeClr val="bg2">
@@ -50606,12 +50906,12 @@
               <a:effectLst/>
               <a:extLst>
                 <a:ext uri="{909E8E84-426E-40dd-AFC4-6F175D3DCCD1}">
-                  <a14:hiddenFill xmlns:a14="http://schemas.microsoft.com/office/drawing/2010/main" xmlns="">
+                  <a14:hiddenFill xmlns="" xmlns:a14="http://schemas.microsoft.com/office/drawing/2010/main">
                     <a:noFill/>
                   </a14:hiddenFill>
                 </a:ext>
                 <a:ext uri="{AF507438-7753-43e0-B8FC-AC1667EBCBE1}">
-                  <a14:hiddenEffects xmlns:a14="http://schemas.microsoft.com/office/drawing/2010/main" xmlns="">
+                  <a14:hiddenEffects xmlns="" xmlns:a14="http://schemas.microsoft.com/office/drawing/2010/main">
                     <a:effectLst>
                       <a:outerShdw blurRad="63500" dist="38099" dir="2700000" algn="ctr" rotWithShape="0">
                         <a:schemeClr val="bg2">
@@ -50718,12 +51018,12 @@
               <a:effectLst/>
               <a:extLst>
                 <a:ext uri="{909E8E84-426E-40dd-AFC4-6F175D3DCCD1}">
-                  <a14:hiddenFill xmlns:a14="http://schemas.microsoft.com/office/drawing/2010/main" xmlns="">
+                  <a14:hiddenFill xmlns="" xmlns:a14="http://schemas.microsoft.com/office/drawing/2010/main">
                     <a:noFill/>
                   </a14:hiddenFill>
                 </a:ext>
                 <a:ext uri="{AF507438-7753-43e0-B8FC-AC1667EBCBE1}">
-                  <a14:hiddenEffects xmlns:a14="http://schemas.microsoft.com/office/drawing/2010/main" xmlns="">
+                  <a14:hiddenEffects xmlns="" xmlns:a14="http://schemas.microsoft.com/office/drawing/2010/main">
                     <a:effectLst>
                       <a:outerShdw blurRad="63500" dist="38099" dir="2700000" algn="ctr" rotWithShape="0">
                         <a:schemeClr val="bg2">
@@ -50807,12 +51107,12 @@
               <a:effectLst/>
               <a:extLst>
                 <a:ext uri="{909E8E84-426E-40dd-AFC4-6F175D3DCCD1}">
-                  <a14:hiddenFill xmlns:a14="http://schemas.microsoft.com/office/drawing/2010/main" xmlns="">
+                  <a14:hiddenFill xmlns="" xmlns:a14="http://schemas.microsoft.com/office/drawing/2010/main">
                     <a:noFill/>
                   </a14:hiddenFill>
                 </a:ext>
                 <a:ext uri="{AF507438-7753-43e0-B8FC-AC1667EBCBE1}">
-                  <a14:hiddenEffects xmlns:a14="http://schemas.microsoft.com/office/drawing/2010/main" xmlns="">
+                  <a14:hiddenEffects xmlns="" xmlns:a14="http://schemas.microsoft.com/office/drawing/2010/main">
                     <a:effectLst>
                       <a:outerShdw blurRad="63500" dist="38099" dir="2700000" algn="ctr" rotWithShape="0">
                         <a:schemeClr val="bg2">
@@ -51338,8 +51638,8 @@
           </p:txBody>
         </p:sp>
       </p:grpSp>
-      <mc:AlternateContent xmlns:mc="http://schemas.openxmlformats.org/markup-compatibility/2006">
-        <mc:Choice xmlns:p14="http://schemas.microsoft.com/office/powerpoint/2010/main" Requires="p14">
+      <mc:AlternateContent xmlns:mc="http://schemas.openxmlformats.org/markup-compatibility/2006" xmlns:p14="http://schemas.microsoft.com/office/powerpoint/2010/main">
+        <mc:Choice Requires="p14">
           <p:contentPart p14:bwMode="auto" r:id="rId4">
             <p14:nvContentPartPr>
               <p14:cNvPr id="45" name="Ink 44">
@@ -51358,7 +51658,7 @@
             </p14:xfrm>
           </p:contentPart>
         </mc:Choice>
-        <mc:Fallback>
+        <mc:Fallback xmlns="">
           <p:pic>
             <p:nvPicPr>
               <p:cNvPr id="45" name="Ink 44">
@@ -51389,8 +51689,8 @@
           </p:pic>
         </mc:Fallback>
       </mc:AlternateContent>
-      <mc:AlternateContent xmlns:mc="http://schemas.openxmlformats.org/markup-compatibility/2006">
-        <mc:Choice xmlns:p14="http://schemas.microsoft.com/office/powerpoint/2010/main" Requires="p14">
+      <mc:AlternateContent xmlns:mc="http://schemas.openxmlformats.org/markup-compatibility/2006" xmlns:p14="http://schemas.microsoft.com/office/powerpoint/2010/main">
+        <mc:Choice Requires="p14">
           <p:contentPart p14:bwMode="auto" r:id="rId6">
             <p14:nvContentPartPr>
               <p14:cNvPr id="46" name="Ink 45">
@@ -51409,7 +51709,7 @@
             </p14:xfrm>
           </p:contentPart>
         </mc:Choice>
-        <mc:Fallback>
+        <mc:Fallback xmlns="">
           <p:pic>
             <p:nvPicPr>
               <p:cNvPr id="46" name="Ink 45">
@@ -51440,8 +51740,8 @@
           </p:pic>
         </mc:Fallback>
       </mc:AlternateContent>
-      <mc:AlternateContent xmlns:mc="http://schemas.openxmlformats.org/markup-compatibility/2006">
-        <mc:Choice xmlns:p14="http://schemas.microsoft.com/office/powerpoint/2010/main" Requires="p14">
+      <mc:AlternateContent xmlns:mc="http://schemas.openxmlformats.org/markup-compatibility/2006" xmlns:p14="http://schemas.microsoft.com/office/powerpoint/2010/main">
+        <mc:Choice Requires="p14">
           <p:contentPart p14:bwMode="auto" r:id="rId7">
             <p14:nvContentPartPr>
               <p14:cNvPr id="47" name="Ink 46">
@@ -51460,7 +51760,7 @@
             </p14:xfrm>
           </p:contentPart>
         </mc:Choice>
-        <mc:Fallback>
+        <mc:Fallback xmlns="">
           <p:pic>
             <p:nvPicPr>
               <p:cNvPr id="47" name="Ink 46">
@@ -51545,12 +51845,12 @@
             <a:effectLst/>
             <a:extLst>
               <a:ext uri="{909E8E84-426E-40dd-AFC4-6F175D3DCCD1}">
-                <a14:hiddenFill xmlns:a14="http://schemas.microsoft.com/office/drawing/2010/main" xmlns="">
+                <a14:hiddenFill xmlns="" xmlns:a14="http://schemas.microsoft.com/office/drawing/2010/main">
                   <a:noFill/>
                 </a14:hiddenFill>
               </a:ext>
               <a:ext uri="{AF507438-7753-43e0-B8FC-AC1667EBCBE1}">
-                <a14:hiddenEffects xmlns:a14="http://schemas.microsoft.com/office/drawing/2010/main" xmlns="">
+                <a14:hiddenEffects xmlns="" xmlns:a14="http://schemas.microsoft.com/office/drawing/2010/main">
                   <a:effectLst>
                     <a:outerShdw blurRad="63500" dist="38099" dir="2700000" algn="ctr" rotWithShape="0">
                       <a:schemeClr val="bg2">
@@ -51631,14 +51931,14 @@
             <a:effectLst/>
             <a:extLst>
               <a:ext uri="{909E8E84-426E-40dd-AFC4-6F175D3DCCD1}">
-                <a14:hiddenFill xmlns:a14="http://schemas.microsoft.com/office/drawing/2010/main" xmlns="">
+                <a14:hiddenFill xmlns="" xmlns:a14="http://schemas.microsoft.com/office/drawing/2010/main">
                   <a:solidFill>
                     <a:srgbClr val="FFFFFF"/>
                   </a:solidFill>
                 </a14:hiddenFill>
               </a:ext>
               <a:ext uri="{91240B29-F687-4f45-9708-019B960494DF}">
-                <a14:hiddenLine xmlns:a14="http://schemas.microsoft.com/office/drawing/2010/main" xmlns="" w="9525">
+                <a14:hiddenLine xmlns="" xmlns:a14="http://schemas.microsoft.com/office/drawing/2010/main" w="9525">
                   <a:solidFill>
                     <a:schemeClr val="tx1"/>
                   </a:solidFill>
@@ -51648,7 +51948,7 @@
                 </a14:hiddenLine>
               </a:ext>
               <a:ext uri="{AF507438-7753-43e0-B8FC-AC1667EBCBE1}">
-                <a14:hiddenEffects xmlns:a14="http://schemas.microsoft.com/office/drawing/2010/main" xmlns="">
+                <a14:hiddenEffects xmlns="" xmlns:a14="http://schemas.microsoft.com/office/drawing/2010/main">
                   <a:effectLst>
                     <a:outerShdw blurRad="63500" dist="38099" dir="2700000" algn="ctr" rotWithShape="0">
                       <a:schemeClr val="bg2">
@@ -51824,8 +52124,8 @@
           </p:txBody>
         </p:sp>
       </p:grpSp>
-      <mc:AlternateContent xmlns:mc="http://schemas.openxmlformats.org/markup-compatibility/2006">
-        <mc:Choice xmlns:p14="http://schemas.microsoft.com/office/powerpoint/2010/main" Requires="p14">
+      <mc:AlternateContent xmlns:mc="http://schemas.openxmlformats.org/markup-compatibility/2006" xmlns:p14="http://schemas.microsoft.com/office/powerpoint/2010/main">
+        <mc:Choice Requires="p14">
           <p:contentPart p14:bwMode="auto" r:id="rId8">
             <p14:nvContentPartPr>
               <p14:cNvPr id="52" name="Ink 51">
@@ -51844,7 +52144,7 @@
             </p14:xfrm>
           </p:contentPart>
         </mc:Choice>
-        <mc:Fallback>
+        <mc:Fallback xmlns="">
           <p:pic>
             <p:nvPicPr>
               <p:cNvPr id="52" name="Ink 51">
@@ -51875,8 +52175,8 @@
           </p:pic>
         </mc:Fallback>
       </mc:AlternateContent>
-      <mc:AlternateContent xmlns:mc="http://schemas.openxmlformats.org/markup-compatibility/2006">
-        <mc:Choice xmlns:p14="http://schemas.microsoft.com/office/powerpoint/2010/main" Requires="p14">
+      <mc:AlternateContent xmlns:mc="http://schemas.openxmlformats.org/markup-compatibility/2006" xmlns:p14="http://schemas.microsoft.com/office/powerpoint/2010/main">
+        <mc:Choice Requires="p14">
           <p:contentPart p14:bwMode="auto" r:id="rId9">
             <p14:nvContentPartPr>
               <p14:cNvPr id="53" name="Ink 52">
@@ -51895,7 +52195,7 @@
             </p14:xfrm>
           </p:contentPart>
         </mc:Choice>
-        <mc:Fallback>
+        <mc:Fallback xmlns="">
           <p:pic>
             <p:nvPicPr>
               <p:cNvPr id="53" name="Ink 52">
@@ -51926,8 +52226,8 @@
           </p:pic>
         </mc:Fallback>
       </mc:AlternateContent>
-      <mc:AlternateContent xmlns:mc="http://schemas.openxmlformats.org/markup-compatibility/2006">
-        <mc:Choice xmlns:p14="http://schemas.microsoft.com/office/powerpoint/2010/main" Requires="p14">
+      <mc:AlternateContent xmlns:mc="http://schemas.openxmlformats.org/markup-compatibility/2006" xmlns:p14="http://schemas.microsoft.com/office/powerpoint/2010/main">
+        <mc:Choice Requires="p14">
           <p:contentPart p14:bwMode="auto" r:id="rId10">
             <p14:nvContentPartPr>
               <p14:cNvPr id="54" name="Ink 53">
@@ -51946,7 +52246,7 @@
             </p14:xfrm>
           </p:contentPart>
         </mc:Choice>
-        <mc:Fallback>
+        <mc:Fallback xmlns="">
           <p:pic>
             <p:nvPicPr>
               <p:cNvPr id="54" name="Ink 53">
